--- a/plugins/gradient-cio/assets/examples/gradient-portfolio-attribution-compare-fallback.pptx
+++ b/plugins/gradient-cio/assets/examples/gradient-portfolio-attribution-compare-fallback.pptx
@@ -444,6 +444,81 @@
               </a:solidFill>
             </c:spPr>
           </c:dPt>
+          <c:dLbls>
+            <c:dLbl>
+              <c:idx val="0"/>
+              <c:tx>
+                <c:rich>
+                  <a:bodyPr/>
+                  <a:lstStyle/>
+                  <a:p>
+                    <a:r>
+                      <a:rPr lang="en-US" sz="800"/>
+                      <a:t>+0.4pp</a:t>
+                    </a:r>
+                  </a:p>
+                </c:rich>
+              </c:tx>
+              <c:dLblPos val="outEnd"/>
+              <c:showLegendKey val="0"/>
+              <c:showVal val="0"/>
+              <c:showCatName val="0"/>
+              <c:showSerName val="0"/>
+              <c:showPercent val="0"/>
+              <c:showBubbleSize val="0"/>
+            </c:dLbl>
+            <c:dLbl>
+              <c:idx val="1"/>
+              <c:tx>
+                <c:rich>
+                  <a:bodyPr/>
+                  <a:lstStyle/>
+                  <a:p>
+                    <a:r>
+                      <a:rPr lang="en-US" sz="800"/>
+                      <a:t>-0.1pp</a:t>
+                    </a:r>
+                  </a:p>
+                </c:rich>
+              </c:tx>
+              <c:dLblPos val="outEnd"/>
+              <c:showLegendKey val="0"/>
+              <c:showVal val="0"/>
+              <c:showCatName val="0"/>
+              <c:showSerName val="0"/>
+              <c:showPercent val="0"/>
+              <c:showBubbleSize val="0"/>
+            </c:dLbl>
+            <c:dLbl>
+              <c:idx val="2"/>
+              <c:tx>
+                <c:rich>
+                  <a:bodyPr/>
+                  <a:lstStyle/>
+                  <a:p>
+                    <a:r>
+                      <a:rPr lang="en-US" sz="800"/>
+                      <a:t>+0.05pp</a:t>
+                    </a:r>
+                  </a:p>
+                </c:rich>
+              </c:tx>
+              <c:dLblPos val="outEnd"/>
+              <c:showLegendKey val="0"/>
+              <c:showVal val="0"/>
+              <c:showCatName val="0"/>
+              <c:showSerName val="0"/>
+              <c:showPercent val="0"/>
+              <c:showBubbleSize val="0"/>
+            </c:dLbl>
+            <c:dLblPos val="outEnd"/>
+            <c:showLegendKey val="0"/>
+            <c:showVal val="0"/>
+            <c:showCatName val="0"/>
+            <c:showSerName val="0"/>
+            <c:showPercent val="0"/>
+            <c:showBubbleSize val="0"/>
+          </c:dLbls>
           <c:cat>
             <c:strRef>
               <c:f>Sheet1!$A$2:$A$4</c:f>
@@ -1112,6 +1187,103 @@
               </a:solidFill>
             </c:spPr>
           </c:dPt>
+          <c:dLbls>
+            <c:dLbl>
+              <c:idx val="0"/>
+              <c:tx>
+                <c:rich>
+                  <a:bodyPr/>
+                  <a:lstStyle/>
+                  <a:p>
+                    <a:r>
+                      <a:rPr lang="en-US" sz="800"/>
+                      <a:t>60.0%</a:t>
+                    </a:r>
+                  </a:p>
+                </c:rich>
+              </c:tx>
+              <c:dLblPos val="outEnd"/>
+              <c:showLegendKey val="0"/>
+              <c:showVal val="0"/>
+              <c:showCatName val="0"/>
+              <c:showSerName val="0"/>
+              <c:showPercent val="0"/>
+              <c:showBubbleSize val="0"/>
+            </c:dLbl>
+            <c:dLbl>
+              <c:idx val="1"/>
+              <c:tx>
+                <c:rich>
+                  <a:bodyPr/>
+                  <a:lstStyle/>
+                  <a:p>
+                    <a:r>
+                      <a:rPr lang="en-US" sz="800"/>
+                      <a:t>55.0%</a:t>
+                    </a:r>
+                  </a:p>
+                </c:rich>
+              </c:tx>
+              <c:dLblPos val="outEnd"/>
+              <c:showLegendKey val="0"/>
+              <c:showVal val="0"/>
+              <c:showCatName val="0"/>
+              <c:showSerName val="0"/>
+              <c:showPercent val="0"/>
+              <c:showBubbleSize val="0"/>
+            </c:dLbl>
+            <c:dLbl>
+              <c:idx val="2"/>
+              <c:tx>
+                <c:rich>
+                  <a:bodyPr/>
+                  <a:lstStyle/>
+                  <a:p>
+                    <a:r>
+                      <a:rPr lang="en-US" sz="800"/>
+                      <a:t>40.0%</a:t>
+                    </a:r>
+                  </a:p>
+                </c:rich>
+              </c:tx>
+              <c:dLblPos val="outEnd"/>
+              <c:showLegendKey val="0"/>
+              <c:showVal val="0"/>
+              <c:showCatName val="0"/>
+              <c:showSerName val="0"/>
+              <c:showPercent val="0"/>
+              <c:showBubbleSize val="0"/>
+            </c:dLbl>
+            <c:dLbl>
+              <c:idx val="3"/>
+              <c:tx>
+                <c:rich>
+                  <a:bodyPr/>
+                  <a:lstStyle/>
+                  <a:p>
+                    <a:r>
+                      <a:rPr lang="en-US" sz="800"/>
+                      <a:t>45.0%</a:t>
+                    </a:r>
+                  </a:p>
+                </c:rich>
+              </c:tx>
+              <c:dLblPos val="outEnd"/>
+              <c:showLegendKey val="0"/>
+              <c:showVal val="0"/>
+              <c:showCatName val="0"/>
+              <c:showSerName val="0"/>
+              <c:showPercent val="0"/>
+              <c:showBubbleSize val="0"/>
+            </c:dLbl>
+            <c:dLblPos val="outEnd"/>
+            <c:showLegendKey val="0"/>
+            <c:showVal val="0"/>
+            <c:showCatName val="0"/>
+            <c:showSerName val="0"/>
+            <c:showPercent val="0"/>
+            <c:showBubbleSize val="0"/>
+          </c:dLbls>
           <c:cat>
             <c:strRef>
               <c:f>Sheet1!$A$2:$A$5</c:f>
@@ -1542,6 +1714,15 @@
       <c:legendPos val="b"/>
       <c:layout/>
       <c:overlay val="0"/>
+      <c:txPr>
+        <a:bodyPr/>
+        <a:lstStyle/>
+        <a:p>
+          <a:pPr>
+            <a:defRPr sz="700"/>
+          </a:pPr>
+        </a:p>
+      </c:txPr>
     </c:legend>
     <c:plotVisOnly val="1"/>
     <c:dispBlanksAs val="gap"/>
@@ -1984,6 +2165,103 @@
               </a:solidFill>
             </c:spPr>
           </c:dPt>
+          <c:dLbls>
+            <c:dLbl>
+              <c:idx val="0"/>
+              <c:tx>
+                <c:rich>
+                  <a:bodyPr/>
+                  <a:lstStyle/>
+                  <a:p>
+                    <a:r>
+                      <a:rPr lang="en-US" sz="800"/>
+                      <a:t>6.50%</a:t>
+                    </a:r>
+                  </a:p>
+                </c:rich>
+              </c:tx>
+              <c:dLblPos val="outEnd"/>
+              <c:showLegendKey val="0"/>
+              <c:showVal val="0"/>
+              <c:showCatName val="0"/>
+              <c:showSerName val="0"/>
+              <c:showPercent val="0"/>
+              <c:showBubbleSize val="0"/>
+            </c:dLbl>
+            <c:dLbl>
+              <c:idx val="1"/>
+              <c:tx>
+                <c:rich>
+                  <a:bodyPr/>
+                  <a:lstStyle/>
+                  <a:p>
+                    <a:r>
+                      <a:rPr lang="en-US" sz="800"/>
+                      <a:t>6.30%</a:t>
+                    </a:r>
+                  </a:p>
+                </c:rich>
+              </c:tx>
+              <c:dLblPos val="outEnd"/>
+              <c:showLegendKey val="0"/>
+              <c:showVal val="0"/>
+              <c:showCatName val="0"/>
+              <c:showSerName val="0"/>
+              <c:showPercent val="0"/>
+              <c:showBubbleSize val="0"/>
+            </c:dLbl>
+            <c:dLbl>
+              <c:idx val="2"/>
+              <c:tx>
+                <c:rich>
+                  <a:bodyPr/>
+                  <a:lstStyle/>
+                  <a:p>
+                    <a:r>
+                      <a:rPr lang="en-US" sz="800"/>
+                      <a:t>9.95%</a:t>
+                    </a:r>
+                  </a:p>
+                </c:rich>
+              </c:tx>
+              <c:dLblPos val="outEnd"/>
+              <c:showLegendKey val="0"/>
+              <c:showVal val="0"/>
+              <c:showCatName val="0"/>
+              <c:showSerName val="0"/>
+              <c:showPercent val="0"/>
+              <c:showBubbleSize val="0"/>
+            </c:dLbl>
+            <c:dLbl>
+              <c:idx val="3"/>
+              <c:tx>
+                <c:rich>
+                  <a:bodyPr/>
+                  <a:lstStyle/>
+                  <a:p>
+                    <a:r>
+                      <a:rPr lang="en-US" sz="800"/>
+                      <a:t>6.05%</a:t>
+                    </a:r>
+                  </a:p>
+                </c:rich>
+              </c:tx>
+              <c:dLblPos val="outEnd"/>
+              <c:showLegendKey val="0"/>
+              <c:showVal val="0"/>
+              <c:showCatName val="0"/>
+              <c:showSerName val="0"/>
+              <c:showPercent val="0"/>
+              <c:showBubbleSize val="0"/>
+            </c:dLbl>
+            <c:dLblPos val="outEnd"/>
+            <c:showLegendKey val="0"/>
+            <c:showVal val="0"/>
+            <c:showCatName val="0"/>
+            <c:showSerName val="0"/>
+            <c:showPercent val="0"/>
+            <c:showBubbleSize val="0"/>
+          </c:dLbls>
           <c:cat>
             <c:strRef>
               <c:f>Sheet1!$A$2:$A$5</c:f>
@@ -2167,6 +2445,81 @@
               </a:solidFill>
             </c:spPr>
           </c:dPt>
+          <c:dLbls>
+            <c:dLbl>
+              <c:idx val="0"/>
+              <c:tx>
+                <c:rich>
+                  <a:bodyPr/>
+                  <a:lstStyle/>
+                  <a:p>
+                    <a:r>
+                      <a:rPr lang="en-US" sz="800"/>
+                      <a:t>+0.2pp</a:t>
+                    </a:r>
+                  </a:p>
+                </c:rich>
+              </c:tx>
+              <c:dLblPos val="outEnd"/>
+              <c:showLegendKey val="0"/>
+              <c:showVal val="0"/>
+              <c:showCatName val="0"/>
+              <c:showSerName val="0"/>
+              <c:showPercent val="0"/>
+              <c:showBubbleSize val="0"/>
+            </c:dLbl>
+            <c:dLbl>
+              <c:idx val="1"/>
+              <c:tx>
+                <c:rich>
+                  <a:bodyPr/>
+                  <a:lstStyle/>
+                  <a:p>
+                    <a:r>
+                      <a:rPr lang="en-US" sz="800"/>
+                      <a:t>-0.8pp</a:t>
+                    </a:r>
+                  </a:p>
+                </c:rich>
+              </c:tx>
+              <c:dLblPos val="outEnd"/>
+              <c:showLegendKey val="0"/>
+              <c:showVal val="0"/>
+              <c:showCatName val="0"/>
+              <c:showSerName val="0"/>
+              <c:showPercent val="0"/>
+              <c:showBubbleSize val="0"/>
+            </c:dLbl>
+            <c:dLbl>
+              <c:idx val="2"/>
+              <c:tx>
+                <c:rich>
+                  <a:bodyPr/>
+                  <a:lstStyle/>
+                  <a:p>
+                    <a:r>
+                      <a:rPr lang="en-US" sz="800"/>
+                      <a:t>0.0pp</a:t>
+                    </a:r>
+                  </a:p>
+                </c:rich>
+              </c:tx>
+              <c:dLblPos val="outEnd"/>
+              <c:showLegendKey val="0"/>
+              <c:showVal val="0"/>
+              <c:showCatName val="0"/>
+              <c:showSerName val="0"/>
+              <c:showPercent val="0"/>
+              <c:showBubbleSize val="0"/>
+            </c:dLbl>
+            <c:dLblPos val="outEnd"/>
+            <c:showLegendKey val="0"/>
+            <c:showVal val="0"/>
+            <c:showCatName val="0"/>
+            <c:showSerName val="0"/>
+            <c:showPercent val="0"/>
+            <c:showBubbleSize val="0"/>
+          </c:dLbls>
           <c:cat>
             <c:strRef>
               <c:f>Sheet1!$A$2:$A$4</c:f>
@@ -5187,7 +5540,7 @@
         </p:nvSpPr>
         <p:spPr>
           <a:xfrm>
-            <a:off x="685800" y="1828800"/>
+            <a:off x="685800" y="1664208"/>
             <a:ext cx="9966960" cy="274320"/>
           </a:xfrm>
           <a:prstGeom prst="rect">
@@ -5205,7 +5558,7 @@
               <a:spcAft>
                 <a:spcPts val="0"/>
               </a:spcAft>
-              <a:defRPr sz="900" b="1">
+              <a:defRPr sz="850" b="1">
                 <a:solidFill>
                   <a:srgbClr val="C6F432"/>
                 </a:solidFill>
@@ -5229,7 +5582,7 @@
         </p:nvSpPr>
         <p:spPr>
           <a:xfrm>
-            <a:off x="685800" y="2176272"/>
+            <a:off x="685800" y="2011680"/>
             <a:ext cx="9966960" cy="1234440"/>
           </a:xfrm>
           <a:prstGeom prst="rect">
@@ -5247,7 +5600,7 @@
               <a:spcAft>
                 <a:spcPts val="0"/>
               </a:spcAft>
-              <a:defRPr sz="3400" b="1">
+              <a:defRPr sz="3300" b="1">
                 <a:solidFill>
                   <a:srgbClr val="FFFFFF"/>
                 </a:solidFill>
@@ -5258,7 +5611,7 @@
               <a:rPr>
                 <a:latin typeface="Inter"/>
               </a:rPr>
-              <a:t>Total Plan - Demo Portfolio (Illustrative, Gradient Maintained) Attribution Comparison</a:t>
+              <a:t>Northstar Total Fund Attribution Comparison</a:t>
             </a:r>
           </a:p>
         </p:txBody>
@@ -5271,8 +5624,8 @@
         </p:nvSpPr>
         <p:spPr>
           <a:xfrm>
-            <a:off x="685800" y="3456432"/>
-            <a:ext cx="9692640" cy="640080"/>
+            <a:off x="685800" y="3273552"/>
+            <a:ext cx="9692640" cy="594360"/>
           </a:xfrm>
           <a:prstGeom prst="rect">
             <a:avLst/>
@@ -5289,7 +5642,7 @@
               <a:spcAft>
                 <a:spcPts val="0"/>
               </a:spcAft>
-              <a:defRPr sz="1500" b="0">
+              <a:defRPr sz="1400" b="0">
                 <a:solidFill>
                   <a:srgbClr val="9AA5B1"/>
                 </a:solidFill>
@@ -5300,7 +5653,7 @@
               <a:rPr>
                 <a:latin typeface="Inter"/>
               </a:rPr>
-              <a:t>Historical and ex ante lanes · planned capabilities unavailable</a:t>
+              <a:t>Historical and forward attribution · available evidence review</a:t>
             </a:r>
           </a:p>
         </p:txBody>
@@ -5313,8 +5666,8 @@
         </p:nvSpPr>
         <p:spPr>
           <a:xfrm>
-            <a:off x="685800" y="4251960"/>
-            <a:ext cx="1005840" cy="54864"/>
+            <a:off x="685800" y="4005072"/>
+            <a:ext cx="822960" cy="45720"/>
           </a:xfrm>
           <a:prstGeom prst="rect">
             <a:avLst/>
@@ -5362,8 +5715,8 @@
         </p:nvSpPr>
         <p:spPr>
           <a:xfrm>
-            <a:off x="685800" y="4572000"/>
-            <a:ext cx="3063240" cy="182880"/>
+            <a:off x="685800" y="4315968"/>
+            <a:ext cx="4709160" cy="182880"/>
           </a:xfrm>
           <a:prstGeom prst="rect">
             <a:avLst/>
@@ -5404,8 +5757,8 @@
         </p:nvSpPr>
         <p:spPr>
           <a:xfrm>
-            <a:off x="685800" y="4773168"/>
-            <a:ext cx="3063240" cy="320040"/>
+            <a:off x="685800" y="4507992"/>
+            <a:ext cx="4709160" cy="310896"/>
           </a:xfrm>
           <a:prstGeom prst="rect">
             <a:avLst/>
@@ -5433,7 +5786,7 @@
               <a:rPr>
                 <a:latin typeface="Inter"/>
               </a:rPr>
-              <a:t>Total Plan - Demo Portfolio (Illustrative, Gradient Maintained)</a:t>
+              <a:t>Northstar Total Fund</a:t>
             </a:r>
           </a:p>
         </p:txBody>
@@ -5446,8 +5799,8 @@
         </p:nvSpPr>
         <p:spPr>
           <a:xfrm>
-            <a:off x="4160520" y="4572000"/>
-            <a:ext cx="3063240" cy="182880"/>
+            <a:off x="5852160" y="4315968"/>
+            <a:ext cx="4709160" cy="182880"/>
           </a:xfrm>
           <a:prstGeom prst="rect">
             <a:avLst/>
@@ -5488,8 +5841,8 @@
         </p:nvSpPr>
         <p:spPr>
           <a:xfrm>
-            <a:off x="4160520" y="4773168"/>
-            <a:ext cx="3063240" cy="320040"/>
+            <a:off x="5852160" y="4507992"/>
+            <a:ext cx="4709160" cy="310896"/>
           </a:xfrm>
           <a:prstGeom prst="rect">
             <a:avLst/>
@@ -5530,8 +5883,8 @@
         </p:nvSpPr>
         <p:spPr>
           <a:xfrm>
-            <a:off x="7635240" y="4572000"/>
-            <a:ext cx="3063240" cy="182880"/>
+            <a:off x="685800" y="4937759"/>
+            <a:ext cx="4709160" cy="182880"/>
           </a:xfrm>
           <a:prstGeom prst="rect">
             <a:avLst/>
@@ -5572,8 +5925,8 @@
         </p:nvSpPr>
         <p:spPr>
           <a:xfrm>
-            <a:off x="7635240" y="4773168"/>
-            <a:ext cx="3063240" cy="320040"/>
+            <a:off x="685800" y="5129783"/>
+            <a:ext cx="4709160" cy="310896"/>
           </a:xfrm>
           <a:prstGeom prst="rect">
             <a:avLst/>
@@ -5601,7 +5954,7 @@
               <a:rPr>
                 <a:latin typeface="Inter"/>
               </a:rPr>
-              <a:t>Root cohort</a:t>
+              <a:t>Total fund</a:t>
             </a:r>
           </a:p>
         </p:txBody>
@@ -5614,8 +5967,8 @@
         </p:nvSpPr>
         <p:spPr>
           <a:xfrm>
-            <a:off x="685800" y="5230368"/>
-            <a:ext cx="3063240" cy="182880"/>
+            <a:off x="5852160" y="4937759"/>
+            <a:ext cx="4709160" cy="182880"/>
           </a:xfrm>
           <a:prstGeom prst="rect">
             <a:avLst/>
@@ -5643,7 +5996,7 @@
               <a:rPr>
                 <a:latin typeface="Inter"/>
               </a:rPr>
-              <a:t>MODE</a:t>
+              <a:t>AVAILABLE VIEWS</a:t>
             </a:r>
           </a:p>
         </p:txBody>
@@ -5656,8 +6009,8 @@
         </p:nvSpPr>
         <p:spPr>
           <a:xfrm>
-            <a:off x="685800" y="5431536"/>
-            <a:ext cx="3063240" cy="320040"/>
+            <a:off x="5852160" y="5129783"/>
+            <a:ext cx="4709160" cy="310896"/>
           </a:xfrm>
           <a:prstGeom prst="rect">
             <a:avLst/>
@@ -5685,7 +6038,7 @@
               <a:rPr>
                 <a:latin typeface="Inter"/>
               </a:rPr>
-              <a:t>Fallback</a:t>
+              <a:t>Historical and forward</a:t>
             </a:r>
           </a:p>
         </p:txBody>
@@ -5698,8 +6051,8 @@
         </p:nvSpPr>
         <p:spPr>
           <a:xfrm>
-            <a:off x="685800" y="5833872"/>
-            <a:ext cx="3063240" cy="384048"/>
+            <a:off x="685800" y="5687568"/>
+            <a:ext cx="3337560" cy="530352"/>
           </a:xfrm>
           <a:prstGeom prst="rect">
             <a:avLst/>
@@ -5747,8 +6100,8 @@
         </p:nvSpPr>
         <p:spPr>
           <a:xfrm>
-            <a:off x="822960" y="5934456"/>
-            <a:ext cx="2788920" cy="164592"/>
+            <a:off x="822960" y="5760720"/>
+            <a:ext cx="3063240" cy="128016"/>
           </a:xfrm>
           <a:prstGeom prst="rect">
             <a:avLst/>
@@ -5765,7 +6118,7 @@
               <a:spcAft>
                 <a:spcPts val="0"/>
               </a:spcAft>
-              <a:defRPr sz="800" b="1">
+              <a:defRPr sz="620" b="1">
                 <a:solidFill>
                   <a:srgbClr val="0D1117"/>
                 </a:solidFill>
@@ -5776,7 +6129,7 @@
               <a:rPr>
                 <a:latin typeface="Inter"/>
               </a:rPr>
-              <a:t>Two governed lanes available</a:t>
+              <a:t>OVERALL VIEW</a:t>
             </a:r>
           </a:p>
         </p:txBody>
@@ -5789,7 +6142,49 @@
         </p:nvSpPr>
         <p:spPr>
           <a:xfrm>
-            <a:off x="3977639" y="5824728"/>
+            <a:off x="822960" y="5916168"/>
+            <a:ext cx="3063240" cy="182880"/>
+          </a:xfrm>
+          <a:prstGeom prst="rect">
+            <a:avLst/>
+          </a:prstGeom>
+          <a:noFill/>
+        </p:spPr>
+        <p:txBody>
+          <a:bodyPr wrap="none" lIns="9144" rIns="9144" tIns="9144" bIns="9144" anchor="t">
+            <a:spAutoFit/>
+          </a:bodyPr>
+          <a:lstStyle/>
+          <a:p>
+            <a:pPr algn="l">
+              <a:spcAft>
+                <a:spcPts val="0"/>
+              </a:spcAft>
+              <a:defRPr sz="900" b="1">
+                <a:solidFill>
+                  <a:srgbClr val="0D1117"/>
+                </a:solidFill>
+                <a:latin typeface="Inter"/>
+              </a:defRPr>
+            </a:pPr>
+            <a:r>
+              <a:rPr>
+                <a:latin typeface="Inter"/>
+              </a:rPr>
+              <a:t>Two governed lanes available</a:t>
+            </a:r>
+          </a:p>
+        </p:txBody>
+      </p:sp>
+      <p:sp>
+        <p:nvSpPr>
+          <p:cNvPr id="20" name="TextBox 19"/>
+          <p:cNvSpPr txBox="1"/>
+          <p:nvPr/>
+        </p:nvSpPr>
+        <p:spPr>
+          <a:xfrm>
+            <a:off x="4297680" y="5733288"/>
             <a:ext cx="3108960" cy="164592"/>
           </a:xfrm>
           <a:prstGeom prst="rect">
@@ -5818,20 +6213,20 @@
               <a:rPr>
                 <a:latin typeface="Inter"/>
               </a:rPr>
-              <a:t>EVIDENCE COMPLETENESS</a:t>
-            </a:r>
-          </a:p>
-        </p:txBody>
-      </p:sp>
-      <p:sp>
-        <p:nvSpPr>
-          <p:cNvPr id="20" name="TextBox 19"/>
+              <a:t>SCOPE REVIEWED</a:t>
+            </a:r>
+          </a:p>
+        </p:txBody>
+      </p:sp>
+      <p:sp>
+        <p:nvSpPr>
+          <p:cNvPr id="21" name="TextBox 20"/>
           <p:cNvSpPr txBox="1"/>
           <p:nvPr/>
         </p:nvSpPr>
         <p:spPr>
           <a:xfrm>
-            <a:off x="3977639" y="5998464"/>
+            <a:off x="4297680" y="5934456"/>
             <a:ext cx="3108960" cy="201168"/>
           </a:xfrm>
           <a:prstGeom prst="rect">
@@ -5867,14 +6262,14 @@
       </p:sp>
       <p:sp>
         <p:nvSpPr>
-          <p:cNvPr id="21" name="TextBox 20"/>
+          <p:cNvPr id="22" name="TextBox 21"/>
           <p:cNvSpPr txBox="1"/>
           <p:nvPr/>
         </p:nvSpPr>
         <p:spPr>
           <a:xfrm>
-            <a:off x="685800" y="6473952"/>
-            <a:ext cx="8046720" cy="182880"/>
+            <a:off x="685800" y="6400800"/>
+            <a:ext cx="8046720" cy="146304"/>
           </a:xfrm>
           <a:prstGeom prst="rect">
             <a:avLst/>
@@ -5902,14 +6297,56 @@
               <a:rPr>
                 <a:latin typeface="Inter"/>
               </a:rPr>
-              <a:t>Confidential — prepared for internal investment use</a:t>
-            </a:r>
-          </a:p>
-        </p:txBody>
-      </p:sp>
-      <p:sp>
-        <p:nvSpPr>
-          <p:cNvPr id="22" name="TextBox 21"/>
+              <a:t>Confidential — Investment Committee</a:t>
+            </a:r>
+          </a:p>
+        </p:txBody>
+      </p:sp>
+      <p:sp>
+        <p:nvSpPr>
+          <p:cNvPr id="23" name="TextBox 22"/>
+          <p:cNvSpPr txBox="1"/>
+          <p:nvPr/>
+        </p:nvSpPr>
+        <p:spPr>
+          <a:xfrm>
+            <a:off x="685800" y="6556248"/>
+            <a:ext cx="8046720" cy="128016"/>
+          </a:xfrm>
+          <a:prstGeom prst="rect">
+            <a:avLst/>
+          </a:prstGeom>
+          <a:noFill/>
+        </p:spPr>
+        <p:txBody>
+          <a:bodyPr wrap="none" lIns="9144" rIns="9144" tIns="9144" bIns="9144" anchor="t">
+            <a:spAutoFit/>
+          </a:bodyPr>
+          <a:lstStyle/>
+          <a:p>
+            <a:pPr algn="l">
+              <a:spcAft>
+                <a:spcPts val="0"/>
+              </a:spcAft>
+              <a:defRPr sz="650" b="0">
+                <a:solidFill>
+                  <a:srgbClr val="8A94A1"/>
+                </a:solidFill>
+                <a:latin typeface="Inter"/>
+              </a:defRPr>
+            </a:pPr>
+            <a:r>
+              <a:rPr>
+                <a:latin typeface="Inter"/>
+              </a:rPr>
+              <a:t>Illustrative sample · not client data</a:t>
+            </a:r>
+          </a:p>
+        </p:txBody>
+      </p:sp>
+      <p:sp>
+        <p:nvSpPr>
+          <p:cNvPr id="24" name="TextBox 23"/>
           <p:cNvSpPr txBox="1"/>
           <p:nvPr/>
         </p:nvSpPr>
@@ -6025,7 +6462,7 @@
         <p:spPr>
           <a:xfrm>
             <a:off x="640080" y="329184"/>
-            <a:ext cx="9875520" cy="182880"/>
+            <a:ext cx="5303520" cy="182880"/>
           </a:xfrm>
           <a:prstGeom prst="rect">
             <a:avLst/>
@@ -6066,6 +6503,48 @@
         </p:nvSpPr>
         <p:spPr>
           <a:xfrm>
+            <a:off x="5897880" y="310896"/>
+            <a:ext cx="4800600" cy="256032"/>
+          </a:xfrm>
+          <a:prstGeom prst="rect">
+            <a:avLst/>
+          </a:prstGeom>
+          <a:noFill/>
+        </p:spPr>
+        <p:txBody>
+          <a:bodyPr wrap="none" lIns="9144" rIns="9144" tIns="9144" bIns="9144" anchor="t">
+            <a:spAutoFit/>
+          </a:bodyPr>
+          <a:lstStyle/>
+          <a:p>
+            <a:pPr algn="r">
+              <a:spcAft>
+                <a:spcPts val="0"/>
+              </a:spcAft>
+              <a:defRPr sz="680" b="1">
+                <a:solidFill>
+                  <a:srgbClr val="4F6B00"/>
+                </a:solidFill>
+                <a:latin typeface="Inter"/>
+              </a:defRPr>
+            </a:pPr>
+            <a:r>
+              <a:rPr>
+                <a:latin typeface="Inter"/>
+              </a:rPr>
+              <a:t>Illustrative, Gradient Maintained — demo data, not the client's holdings or managers</a:t>
+            </a:r>
+          </a:p>
+        </p:txBody>
+      </p:sp>
+      <p:sp>
+        <p:nvSpPr>
+          <p:cNvPr id="5" name="TextBox 4"/>
+          <p:cNvSpPr txBox="1"/>
+          <p:nvPr/>
+        </p:nvSpPr>
+        <p:spPr>
+          <a:xfrm>
             <a:off x="640080" y="566928"/>
             <a:ext cx="10058400" cy="530352"/>
           </a:xfrm>
@@ -6102,7 +6581,7 @@
       </p:sp>
       <p:sp>
         <p:nvSpPr>
-          <p:cNvPr id="5" name="Rectangle 4"/>
+          <p:cNvPr id="6" name="Rectangle 5"/>
           <p:cNvSpPr/>
           <p:nvPr/>
         </p:nvSpPr>
@@ -6151,7 +6630,7 @@
       </p:sp>
       <p:sp>
         <p:nvSpPr>
-          <p:cNvPr id="6" name="Rectangle 5"/>
+          <p:cNvPr id="7" name="Rectangle 6"/>
           <p:cNvSpPr/>
           <p:nvPr/>
         </p:nvSpPr>
@@ -6200,7 +6679,7 @@
       </p:sp>
       <p:sp>
         <p:nvSpPr>
-          <p:cNvPr id="7" name="TextBox 6"/>
+          <p:cNvPr id="8" name="TextBox 7"/>
           <p:cNvSpPr txBox="1"/>
           <p:nvPr/>
         </p:nvSpPr>
@@ -6242,7 +6721,7 @@
       </p:sp>
       <p:sp>
         <p:nvSpPr>
-          <p:cNvPr id="8" name="TextBox 7"/>
+          <p:cNvPr id="9" name="TextBox 8"/>
           <p:cNvSpPr txBox="1"/>
           <p:nvPr/>
         </p:nvSpPr>
@@ -6284,7 +6763,7 @@
       </p:sp>
       <p:graphicFrame>
         <p:nvGraphicFramePr>
-          <p:cNvPr id="9" name="Chart 8"/>
+          <p:cNvPr id="10" name="Chart 9"/>
           <p:cNvGraphicFramePr>
             <a:graphicFrameLocks noGrp="1"/>
           </p:cNvGraphicFramePr>
@@ -6302,7 +6781,7 @@
       </p:graphicFrame>
       <p:sp>
         <p:nvSpPr>
-          <p:cNvPr id="10" name="Rectangle 9"/>
+          <p:cNvPr id="11" name="Rectangle 10"/>
           <p:cNvSpPr/>
           <p:nvPr/>
         </p:nvSpPr>
@@ -6351,7 +6830,7 @@
       </p:sp>
       <p:sp>
         <p:nvSpPr>
-          <p:cNvPr id="11" name="TextBox 10"/>
+          <p:cNvPr id="12" name="TextBox 11"/>
           <p:cNvSpPr txBox="1"/>
           <p:nvPr/>
         </p:nvSpPr>
@@ -6393,7 +6872,7 @@
       </p:sp>
       <p:sp>
         <p:nvSpPr>
-          <p:cNvPr id="12" name="TextBox 11"/>
+          <p:cNvPr id="13" name="TextBox 12"/>
           <p:cNvSpPr txBox="1"/>
           <p:nvPr/>
         </p:nvSpPr>
@@ -6428,14 +6907,14 @@
               <a:rPr>
                 <a:latin typeface="Inter"/>
               </a:rPr>
-              <a:t>Confidential — prepared for internal investment use · Data as of 2026-09-30</a:t>
-            </a:r>
-          </a:p>
-        </p:txBody>
-      </p:sp>
-      <p:sp>
-        <p:nvSpPr>
-          <p:cNvPr id="13" name="TextBox 12"/>
+              <a:t>Confidential — Investment Committee · Data as of 2026-09-30</a:t>
+            </a:r>
+          </a:p>
+        </p:txBody>
+      </p:sp>
+      <p:sp>
+        <p:nvSpPr>
+          <p:cNvPr id="14" name="TextBox 13"/>
           <p:cNvSpPr txBox="1"/>
           <p:nvPr/>
         </p:nvSpPr>
@@ -6551,7 +7030,7 @@
         <p:spPr>
           <a:xfrm>
             <a:off x="640080" y="329184"/>
-            <a:ext cx="9875520" cy="182880"/>
+            <a:ext cx="5303520" cy="182880"/>
           </a:xfrm>
           <a:prstGeom prst="rect">
             <a:avLst/>
@@ -6592,6 +7071,48 @@
         </p:nvSpPr>
         <p:spPr>
           <a:xfrm>
+            <a:off x="5897880" y="310896"/>
+            <a:ext cx="4800600" cy="256032"/>
+          </a:xfrm>
+          <a:prstGeom prst="rect">
+            <a:avLst/>
+          </a:prstGeom>
+          <a:noFill/>
+        </p:spPr>
+        <p:txBody>
+          <a:bodyPr wrap="none" lIns="9144" rIns="9144" tIns="9144" bIns="9144" anchor="t">
+            <a:spAutoFit/>
+          </a:bodyPr>
+          <a:lstStyle/>
+          <a:p>
+            <a:pPr algn="r">
+              <a:spcAft>
+                <a:spcPts val="0"/>
+              </a:spcAft>
+              <a:defRPr sz="680" b="1">
+                <a:solidFill>
+                  <a:srgbClr val="4F6B00"/>
+                </a:solidFill>
+                <a:latin typeface="Inter"/>
+              </a:defRPr>
+            </a:pPr>
+            <a:r>
+              <a:rPr>
+                <a:latin typeface="Inter"/>
+              </a:rPr>
+              <a:t>Illustrative, Gradient Maintained — demo data, not the client's holdings or managers</a:t>
+            </a:r>
+          </a:p>
+        </p:txBody>
+      </p:sp>
+      <p:sp>
+        <p:nvSpPr>
+          <p:cNvPr id="5" name="TextBox 4"/>
+          <p:cNvSpPr txBox="1"/>
+          <p:nvPr/>
+        </p:nvSpPr>
+        <p:spPr>
+          <a:xfrm>
             <a:off x="640080" y="566928"/>
             <a:ext cx="10058400" cy="530352"/>
           </a:xfrm>
@@ -6628,7 +7149,7 @@
       </p:sp>
       <p:sp>
         <p:nvSpPr>
-          <p:cNvPr id="5" name="Rectangle 4"/>
+          <p:cNvPr id="6" name="Rectangle 5"/>
           <p:cNvSpPr/>
           <p:nvPr/>
         </p:nvSpPr>
@@ -6677,7 +7198,7 @@
       </p:sp>
       <p:sp>
         <p:nvSpPr>
-          <p:cNvPr id="6" name="Rectangle 5"/>
+          <p:cNvPr id="7" name="Rectangle 6"/>
           <p:cNvSpPr/>
           <p:nvPr/>
         </p:nvSpPr>
@@ -6726,7 +7247,7 @@
       </p:sp>
       <p:sp>
         <p:nvSpPr>
-          <p:cNvPr id="7" name="TextBox 6"/>
+          <p:cNvPr id="8" name="TextBox 7"/>
           <p:cNvSpPr txBox="1"/>
           <p:nvPr/>
         </p:nvSpPr>
@@ -6768,7 +7289,7 @@
       </p:sp>
       <p:sp>
         <p:nvSpPr>
-          <p:cNvPr id="8" name="Rectangle 7"/>
+          <p:cNvPr id="9" name="Rectangle 8"/>
           <p:cNvSpPr/>
           <p:nvPr/>
         </p:nvSpPr>
@@ -6817,7 +7338,7 @@
       </p:sp>
       <p:sp>
         <p:nvSpPr>
-          <p:cNvPr id="9" name="Rectangle 8"/>
+          <p:cNvPr id="10" name="Rectangle 9"/>
           <p:cNvSpPr/>
           <p:nvPr/>
         </p:nvSpPr>
@@ -6866,7 +7387,7 @@
       </p:sp>
       <p:sp>
         <p:nvSpPr>
-          <p:cNvPr id="10" name="TextBox 9"/>
+          <p:cNvPr id="11" name="TextBox 10"/>
           <p:cNvSpPr txBox="1"/>
           <p:nvPr/>
         </p:nvSpPr>
@@ -6908,7 +7429,7 @@
       </p:sp>
       <p:sp>
         <p:nvSpPr>
-          <p:cNvPr id="11" name="TextBox 10"/>
+          <p:cNvPr id="12" name="TextBox 11"/>
           <p:cNvSpPr txBox="1"/>
           <p:nvPr/>
         </p:nvSpPr>
@@ -6950,7 +7471,7 @@
       </p:sp>
       <p:sp>
         <p:nvSpPr>
-          <p:cNvPr id="12" name="Rectangle 11"/>
+          <p:cNvPr id="13" name="Rectangle 12"/>
           <p:cNvSpPr/>
           <p:nvPr/>
         </p:nvSpPr>
@@ -6999,7 +7520,7 @@
       </p:sp>
       <p:sp>
         <p:nvSpPr>
-          <p:cNvPr id="13" name="Rectangle 12"/>
+          <p:cNvPr id="14" name="Rectangle 13"/>
           <p:cNvSpPr/>
           <p:nvPr/>
         </p:nvSpPr>
@@ -7048,7 +7569,7 @@
       </p:sp>
       <p:sp>
         <p:nvSpPr>
-          <p:cNvPr id="14" name="TextBox 13"/>
+          <p:cNvPr id="15" name="TextBox 14"/>
           <p:cNvSpPr txBox="1"/>
           <p:nvPr/>
         </p:nvSpPr>
@@ -7090,7 +7611,7 @@
       </p:sp>
       <p:sp>
         <p:nvSpPr>
-          <p:cNvPr id="15" name="TextBox 14"/>
+          <p:cNvPr id="16" name="TextBox 15"/>
           <p:cNvSpPr txBox="1"/>
           <p:nvPr/>
         </p:nvSpPr>
@@ -7132,7 +7653,7 @@
       </p:sp>
       <p:sp>
         <p:nvSpPr>
-          <p:cNvPr id="16" name="Rectangle 15"/>
+          <p:cNvPr id="17" name="Rectangle 16"/>
           <p:cNvSpPr/>
           <p:nvPr/>
         </p:nvSpPr>
@@ -7181,7 +7702,7 @@
       </p:sp>
       <p:sp>
         <p:nvSpPr>
-          <p:cNvPr id="17" name="Rectangle 16"/>
+          <p:cNvPr id="18" name="Rectangle 17"/>
           <p:cNvSpPr/>
           <p:nvPr/>
         </p:nvSpPr>
@@ -7230,7 +7751,7 @@
       </p:sp>
       <p:sp>
         <p:nvSpPr>
-          <p:cNvPr id="18" name="TextBox 17"/>
+          <p:cNvPr id="19" name="TextBox 18"/>
           <p:cNvSpPr txBox="1"/>
           <p:nvPr/>
         </p:nvSpPr>
@@ -7272,7 +7793,7 @@
       </p:sp>
       <p:sp>
         <p:nvSpPr>
-          <p:cNvPr id="19" name="TextBox 18"/>
+          <p:cNvPr id="20" name="TextBox 19"/>
           <p:cNvSpPr txBox="1"/>
           <p:nvPr/>
         </p:nvSpPr>
@@ -7314,7 +7835,7 @@
       </p:sp>
       <p:sp>
         <p:nvSpPr>
-          <p:cNvPr id="20" name="Rectangle 19"/>
+          <p:cNvPr id="21" name="Rectangle 20"/>
           <p:cNvSpPr/>
           <p:nvPr/>
         </p:nvSpPr>
@@ -7363,7 +7884,7 @@
       </p:sp>
       <p:sp>
         <p:nvSpPr>
-          <p:cNvPr id="21" name="TextBox 20"/>
+          <p:cNvPr id="22" name="TextBox 21"/>
           <p:cNvSpPr txBox="1"/>
           <p:nvPr/>
         </p:nvSpPr>
@@ -7405,7 +7926,7 @@
       </p:sp>
       <p:sp>
         <p:nvSpPr>
-          <p:cNvPr id="22" name="TextBox 21"/>
+          <p:cNvPr id="23" name="TextBox 22"/>
           <p:cNvSpPr txBox="1"/>
           <p:nvPr/>
         </p:nvSpPr>
@@ -7440,14 +7961,14 @@
               <a:rPr>
                 <a:latin typeface="Inter"/>
               </a:rPr>
-              <a:t>Confidential — prepared for internal investment use · Data as of 2026-09-30</a:t>
-            </a:r>
-          </a:p>
-        </p:txBody>
-      </p:sp>
-      <p:sp>
-        <p:nvSpPr>
-          <p:cNvPr id="23" name="TextBox 22"/>
+              <a:t>Confidential — Investment Committee · Data as of 2026-09-30</a:t>
+            </a:r>
+          </a:p>
+        </p:txBody>
+      </p:sp>
+      <p:sp>
+        <p:nvSpPr>
+          <p:cNvPr id="24" name="TextBox 23"/>
           <p:cNvSpPr txBox="1"/>
           <p:nvPr/>
         </p:nvSpPr>
@@ -7563,7 +8084,7 @@
         <p:spPr>
           <a:xfrm>
             <a:off x="640080" y="329184"/>
-            <a:ext cx="9875520" cy="182880"/>
+            <a:ext cx="5303520" cy="182880"/>
           </a:xfrm>
           <a:prstGeom prst="rect">
             <a:avLst/>
@@ -7604,6 +8125,48 @@
         </p:nvSpPr>
         <p:spPr>
           <a:xfrm>
+            <a:off x="5897880" y="310896"/>
+            <a:ext cx="4800600" cy="256032"/>
+          </a:xfrm>
+          <a:prstGeom prst="rect">
+            <a:avLst/>
+          </a:prstGeom>
+          <a:noFill/>
+        </p:spPr>
+        <p:txBody>
+          <a:bodyPr wrap="none" lIns="9144" rIns="9144" tIns="9144" bIns="9144" anchor="t">
+            <a:spAutoFit/>
+          </a:bodyPr>
+          <a:lstStyle/>
+          <a:p>
+            <a:pPr algn="r">
+              <a:spcAft>
+                <a:spcPts val="0"/>
+              </a:spcAft>
+              <a:defRPr sz="680" b="1">
+                <a:solidFill>
+                  <a:srgbClr val="4F6B00"/>
+                </a:solidFill>
+                <a:latin typeface="Inter"/>
+              </a:defRPr>
+            </a:pPr>
+            <a:r>
+              <a:rPr>
+                <a:latin typeface="Inter"/>
+              </a:rPr>
+              <a:t>Illustrative, Gradient Maintained — demo data, not the client's holdings or managers</a:t>
+            </a:r>
+          </a:p>
+        </p:txBody>
+      </p:sp>
+      <p:sp>
+        <p:nvSpPr>
+          <p:cNvPr id="5" name="TextBox 4"/>
+          <p:cNvSpPr txBox="1"/>
+          <p:nvPr/>
+        </p:nvSpPr>
+        <p:spPr>
+          <a:xfrm>
             <a:off x="640080" y="566928"/>
             <a:ext cx="10058400" cy="530352"/>
           </a:xfrm>
@@ -7640,7 +8203,7 @@
       </p:sp>
       <p:sp>
         <p:nvSpPr>
-          <p:cNvPr id="5" name="Rectangle 4"/>
+          <p:cNvPr id="6" name="Rectangle 5"/>
           <p:cNvSpPr/>
           <p:nvPr/>
         </p:nvSpPr>
@@ -7689,7 +8252,7 @@
       </p:sp>
       <p:sp>
         <p:nvSpPr>
-          <p:cNvPr id="6" name="Rectangle 5"/>
+          <p:cNvPr id="7" name="Rectangle 6"/>
           <p:cNvSpPr/>
           <p:nvPr/>
         </p:nvSpPr>
@@ -7738,7 +8301,7 @@
       </p:sp>
       <p:sp>
         <p:nvSpPr>
-          <p:cNvPr id="7" name="TextBox 6"/>
+          <p:cNvPr id="8" name="TextBox 7"/>
           <p:cNvSpPr txBox="1"/>
           <p:nvPr/>
         </p:nvSpPr>
@@ -7780,7 +8343,7 @@
       </p:sp>
       <p:sp>
         <p:nvSpPr>
-          <p:cNvPr id="8" name="TextBox 7"/>
+          <p:cNvPr id="9" name="TextBox 8"/>
           <p:cNvSpPr txBox="1"/>
           <p:nvPr/>
         </p:nvSpPr>
@@ -7822,7 +8385,7 @@
       </p:sp>
       <p:graphicFrame>
         <p:nvGraphicFramePr>
-          <p:cNvPr id="9" name="Chart 8"/>
+          <p:cNvPr id="10" name="Chart 9"/>
           <p:cNvGraphicFramePr>
             <a:graphicFrameLocks noGrp="1"/>
           </p:cNvGraphicFramePr>
@@ -7840,7 +8403,7 @@
       </p:graphicFrame>
       <p:sp>
         <p:nvSpPr>
-          <p:cNvPr id="10" name="Rectangle 9"/>
+          <p:cNvPr id="11" name="Rectangle 10"/>
           <p:cNvSpPr/>
           <p:nvPr/>
         </p:nvSpPr>
@@ -7889,7 +8452,7 @@
       </p:sp>
       <p:sp>
         <p:nvSpPr>
-          <p:cNvPr id="11" name="TextBox 10"/>
+          <p:cNvPr id="12" name="TextBox 11"/>
           <p:cNvSpPr txBox="1"/>
           <p:nvPr/>
         </p:nvSpPr>
@@ -7931,7 +8494,7 @@
       </p:sp>
       <p:sp>
         <p:nvSpPr>
-          <p:cNvPr id="12" name="TextBox 11"/>
+          <p:cNvPr id="13" name="TextBox 12"/>
           <p:cNvSpPr txBox="1"/>
           <p:nvPr/>
         </p:nvSpPr>
@@ -7966,14 +8529,14 @@
               <a:rPr>
                 <a:latin typeface="Inter"/>
               </a:rPr>
-              <a:t>Confidential — prepared for internal investment use · Data as of 2026-09-30</a:t>
-            </a:r>
-          </a:p>
-        </p:txBody>
-      </p:sp>
-      <p:sp>
-        <p:nvSpPr>
-          <p:cNvPr id="13" name="TextBox 12"/>
+              <a:t>Confidential — Investment Committee · Data as of 2026-09-30</a:t>
+            </a:r>
+          </a:p>
+        </p:txBody>
+      </p:sp>
+      <p:sp>
+        <p:nvSpPr>
+          <p:cNvPr id="14" name="TextBox 13"/>
           <p:cNvSpPr txBox="1"/>
           <p:nvPr/>
         </p:nvSpPr>
@@ -8089,7 +8652,7 @@
         <p:spPr>
           <a:xfrm>
             <a:off x="640080" y="329184"/>
-            <a:ext cx="9875520" cy="182880"/>
+            <a:ext cx="5303520" cy="182880"/>
           </a:xfrm>
           <a:prstGeom prst="rect">
             <a:avLst/>
@@ -8130,6 +8693,48 @@
         </p:nvSpPr>
         <p:spPr>
           <a:xfrm>
+            <a:off x="5897880" y="310896"/>
+            <a:ext cx="4800600" cy="256032"/>
+          </a:xfrm>
+          <a:prstGeom prst="rect">
+            <a:avLst/>
+          </a:prstGeom>
+          <a:noFill/>
+        </p:spPr>
+        <p:txBody>
+          <a:bodyPr wrap="none" lIns="9144" rIns="9144" tIns="9144" bIns="9144" anchor="t">
+            <a:spAutoFit/>
+          </a:bodyPr>
+          <a:lstStyle/>
+          <a:p>
+            <a:pPr algn="r">
+              <a:spcAft>
+                <a:spcPts val="0"/>
+              </a:spcAft>
+              <a:defRPr sz="680" b="1">
+                <a:solidFill>
+                  <a:srgbClr val="4F6B00"/>
+                </a:solidFill>
+                <a:latin typeface="Inter"/>
+              </a:defRPr>
+            </a:pPr>
+            <a:r>
+              <a:rPr>
+                <a:latin typeface="Inter"/>
+              </a:rPr>
+              <a:t>Illustrative, Gradient Maintained — demo data, not the client's holdings or managers</a:t>
+            </a:r>
+          </a:p>
+        </p:txBody>
+      </p:sp>
+      <p:sp>
+        <p:nvSpPr>
+          <p:cNvPr id="5" name="TextBox 4"/>
+          <p:cNvSpPr txBox="1"/>
+          <p:nvPr/>
+        </p:nvSpPr>
+        <p:spPr>
+          <a:xfrm>
             <a:off x="640080" y="566928"/>
             <a:ext cx="10058400" cy="530352"/>
           </a:xfrm>
@@ -8166,7 +8771,7 @@
       </p:sp>
       <p:sp>
         <p:nvSpPr>
-          <p:cNvPr id="5" name="Rectangle 4"/>
+          <p:cNvPr id="6" name="Rectangle 5"/>
           <p:cNvSpPr/>
           <p:nvPr/>
         </p:nvSpPr>
@@ -8215,7 +8820,7 @@
       </p:sp>
       <p:sp>
         <p:nvSpPr>
-          <p:cNvPr id="6" name="Rectangle 5"/>
+          <p:cNvPr id="7" name="Rectangle 6"/>
           <p:cNvSpPr/>
           <p:nvPr/>
         </p:nvSpPr>
@@ -8264,7 +8869,7 @@
       </p:sp>
       <p:sp>
         <p:nvSpPr>
-          <p:cNvPr id="7" name="TextBox 6"/>
+          <p:cNvPr id="8" name="TextBox 7"/>
           <p:cNvSpPr txBox="1"/>
           <p:nvPr/>
         </p:nvSpPr>
@@ -8306,7 +8911,7 @@
       </p:sp>
       <p:sp>
         <p:nvSpPr>
-          <p:cNvPr id="8" name="TextBox 7"/>
+          <p:cNvPr id="9" name="TextBox 8"/>
           <p:cNvSpPr txBox="1"/>
           <p:nvPr/>
         </p:nvSpPr>
@@ -8348,7 +8953,7 @@
       </p:sp>
       <p:graphicFrame>
         <p:nvGraphicFramePr>
-          <p:cNvPr id="9" name="Table 8"/>
+          <p:cNvPr id="10" name="Table 9"/>
           <p:cNvGraphicFramePr>
             <a:graphicFrameLocks noGrp="1"/>
           </p:cNvGraphicFramePr>
@@ -8413,7 +9018,7 @@
                         <a:rPr>
                           <a:latin typeface="Inter"/>
                         </a:rPr>
-                        <a:t>2026 Strategic CMA (TEST) [S3]</a:t>
+                        <a:t>2026 Strategic CMA [S3]</a:t>
                       </a:r>
                     </a:p>
                   </a:txBody>
@@ -8654,7 +9259,7 @@
       </p:graphicFrame>
       <p:sp>
         <p:nvSpPr>
-          <p:cNvPr id="10" name="Rectangle 9"/>
+          <p:cNvPr id="11" name="Rectangle 10"/>
           <p:cNvSpPr/>
           <p:nvPr/>
         </p:nvSpPr>
@@ -8703,7 +9308,7 @@
       </p:sp>
       <p:sp>
         <p:nvSpPr>
-          <p:cNvPr id="11" name="TextBox 10"/>
+          <p:cNvPr id="12" name="TextBox 11"/>
           <p:cNvSpPr txBox="1"/>
           <p:nvPr/>
         </p:nvSpPr>
@@ -8745,7 +9350,7 @@
       </p:sp>
       <p:sp>
         <p:nvSpPr>
-          <p:cNvPr id="12" name="TextBox 11"/>
+          <p:cNvPr id="13" name="TextBox 12"/>
           <p:cNvSpPr txBox="1"/>
           <p:nvPr/>
         </p:nvSpPr>
@@ -8780,14 +9385,14 @@
               <a:rPr>
                 <a:latin typeface="Inter"/>
               </a:rPr>
-              <a:t>Confidential — prepared for internal investment use · Data as of 2026-09-30</a:t>
-            </a:r>
-          </a:p>
-        </p:txBody>
-      </p:sp>
-      <p:sp>
-        <p:nvSpPr>
-          <p:cNvPr id="13" name="TextBox 12"/>
+              <a:t>Confidential — Investment Committee · Data as of 2026-09-30</a:t>
+            </a:r>
+          </a:p>
+        </p:txBody>
+      </p:sp>
+      <p:sp>
+        <p:nvSpPr>
+          <p:cNvPr id="14" name="TextBox 13"/>
           <p:cNvSpPr txBox="1"/>
           <p:nvPr/>
         </p:nvSpPr>
@@ -8903,7 +9508,7 @@
         <p:spPr>
           <a:xfrm>
             <a:off x="640080" y="329184"/>
-            <a:ext cx="9875520" cy="182880"/>
+            <a:ext cx="5303520" cy="182880"/>
           </a:xfrm>
           <a:prstGeom prst="rect">
             <a:avLst/>
@@ -8944,6 +9549,48 @@
         </p:nvSpPr>
         <p:spPr>
           <a:xfrm>
+            <a:off x="5897880" y="310896"/>
+            <a:ext cx="4800600" cy="256032"/>
+          </a:xfrm>
+          <a:prstGeom prst="rect">
+            <a:avLst/>
+          </a:prstGeom>
+          <a:noFill/>
+        </p:spPr>
+        <p:txBody>
+          <a:bodyPr wrap="none" lIns="9144" rIns="9144" tIns="9144" bIns="9144" anchor="t">
+            <a:spAutoFit/>
+          </a:bodyPr>
+          <a:lstStyle/>
+          <a:p>
+            <a:pPr algn="r">
+              <a:spcAft>
+                <a:spcPts val="0"/>
+              </a:spcAft>
+              <a:defRPr sz="680" b="1">
+                <a:solidFill>
+                  <a:srgbClr val="4F6B00"/>
+                </a:solidFill>
+                <a:latin typeface="Inter"/>
+              </a:defRPr>
+            </a:pPr>
+            <a:r>
+              <a:rPr>
+                <a:latin typeface="Inter"/>
+              </a:rPr>
+              <a:t>Illustrative, Gradient Maintained — demo data, not the client's holdings or managers</a:t>
+            </a:r>
+          </a:p>
+        </p:txBody>
+      </p:sp>
+      <p:sp>
+        <p:nvSpPr>
+          <p:cNvPr id="5" name="TextBox 4"/>
+          <p:cNvSpPr txBox="1"/>
+          <p:nvPr/>
+        </p:nvSpPr>
+        <p:spPr>
+          <a:xfrm>
             <a:off x="640080" y="566928"/>
             <a:ext cx="10058400" cy="530352"/>
           </a:xfrm>
@@ -8980,7 +9627,7 @@
       </p:sp>
       <p:sp>
         <p:nvSpPr>
-          <p:cNvPr id="5" name="Rectangle 4"/>
+          <p:cNvPr id="6" name="Rectangle 5"/>
           <p:cNvSpPr/>
           <p:nvPr/>
         </p:nvSpPr>
@@ -9029,7 +9676,7 @@
       </p:sp>
       <p:sp>
         <p:nvSpPr>
-          <p:cNvPr id="6" name="Rectangle 5"/>
+          <p:cNvPr id="7" name="Rectangle 6"/>
           <p:cNvSpPr/>
           <p:nvPr/>
         </p:nvSpPr>
@@ -9078,7 +9725,7 @@
       </p:sp>
       <p:sp>
         <p:nvSpPr>
-          <p:cNvPr id="7" name="TextBox 6"/>
+          <p:cNvPr id="8" name="TextBox 7"/>
           <p:cNvSpPr txBox="1"/>
           <p:nvPr/>
         </p:nvSpPr>
@@ -9120,7 +9767,7 @@
       </p:sp>
       <p:sp>
         <p:nvSpPr>
-          <p:cNvPr id="8" name="TextBox 7"/>
+          <p:cNvPr id="9" name="TextBox 8"/>
           <p:cNvSpPr txBox="1"/>
           <p:nvPr/>
         </p:nvSpPr>
@@ -9162,7 +9809,7 @@
       </p:sp>
       <p:graphicFrame>
         <p:nvGraphicFramePr>
-          <p:cNvPr id="9" name="Chart 8"/>
+          <p:cNvPr id="10" name="Chart 9"/>
           <p:cNvGraphicFramePr>
             <a:graphicFrameLocks noGrp="1"/>
           </p:cNvGraphicFramePr>
@@ -9180,7 +9827,7 @@
       </p:graphicFrame>
       <p:sp>
         <p:nvSpPr>
-          <p:cNvPr id="10" name="Rectangle 9"/>
+          <p:cNvPr id="11" name="Rectangle 10"/>
           <p:cNvSpPr/>
           <p:nvPr/>
         </p:nvSpPr>
@@ -9229,7 +9876,7 @@
       </p:sp>
       <p:sp>
         <p:nvSpPr>
-          <p:cNvPr id="11" name="TextBox 10"/>
+          <p:cNvPr id="12" name="TextBox 11"/>
           <p:cNvSpPr txBox="1"/>
           <p:nvPr/>
         </p:nvSpPr>
@@ -9271,7 +9918,7 @@
       </p:sp>
       <p:sp>
         <p:nvSpPr>
-          <p:cNvPr id="12" name="TextBox 11"/>
+          <p:cNvPr id="13" name="TextBox 12"/>
           <p:cNvSpPr txBox="1"/>
           <p:nvPr/>
         </p:nvSpPr>
@@ -9306,14 +9953,14 @@
               <a:rPr>
                 <a:latin typeface="Inter"/>
               </a:rPr>
-              <a:t>Confidential — prepared for internal investment use · Data as of 2026-09-30</a:t>
-            </a:r>
-          </a:p>
-        </p:txBody>
-      </p:sp>
-      <p:sp>
-        <p:nvSpPr>
-          <p:cNvPr id="13" name="TextBox 12"/>
+              <a:t>Confidential — Investment Committee · Data as of 2026-09-30</a:t>
+            </a:r>
+          </a:p>
+        </p:txBody>
+      </p:sp>
+      <p:sp>
+        <p:nvSpPr>
+          <p:cNvPr id="14" name="TextBox 13"/>
           <p:cNvSpPr txBox="1"/>
           <p:nvPr/>
         </p:nvSpPr>
@@ -9429,7 +10076,7 @@
         <p:spPr>
           <a:xfrm>
             <a:off x="640080" y="329184"/>
-            <a:ext cx="9875520" cy="182880"/>
+            <a:ext cx="5303520" cy="182880"/>
           </a:xfrm>
           <a:prstGeom prst="rect">
             <a:avLst/>
@@ -9470,6 +10117,48 @@
         </p:nvSpPr>
         <p:spPr>
           <a:xfrm>
+            <a:off x="5897880" y="310896"/>
+            <a:ext cx="4800600" cy="256032"/>
+          </a:xfrm>
+          <a:prstGeom prst="rect">
+            <a:avLst/>
+          </a:prstGeom>
+          <a:noFill/>
+        </p:spPr>
+        <p:txBody>
+          <a:bodyPr wrap="none" lIns="9144" rIns="9144" tIns="9144" bIns="9144" anchor="t">
+            <a:spAutoFit/>
+          </a:bodyPr>
+          <a:lstStyle/>
+          <a:p>
+            <a:pPr algn="r">
+              <a:spcAft>
+                <a:spcPts val="0"/>
+              </a:spcAft>
+              <a:defRPr sz="680" b="1">
+                <a:solidFill>
+                  <a:srgbClr val="4F6B00"/>
+                </a:solidFill>
+                <a:latin typeface="Inter"/>
+              </a:defRPr>
+            </a:pPr>
+            <a:r>
+              <a:rPr>
+                <a:latin typeface="Inter"/>
+              </a:rPr>
+              <a:t>Illustrative, Gradient Maintained — demo data, not the client's holdings or managers</a:t>
+            </a:r>
+          </a:p>
+        </p:txBody>
+      </p:sp>
+      <p:sp>
+        <p:nvSpPr>
+          <p:cNvPr id="5" name="TextBox 4"/>
+          <p:cNvSpPr txBox="1"/>
+          <p:nvPr/>
+        </p:nvSpPr>
+        <p:spPr>
+          <a:xfrm>
             <a:off x="640080" y="566928"/>
             <a:ext cx="10058400" cy="530352"/>
           </a:xfrm>
@@ -9506,7 +10195,7 @@
       </p:sp>
       <p:sp>
         <p:nvSpPr>
-          <p:cNvPr id="5" name="Rectangle 4"/>
+          <p:cNvPr id="6" name="Rectangle 5"/>
           <p:cNvSpPr/>
           <p:nvPr/>
         </p:nvSpPr>
@@ -9555,7 +10244,7 @@
       </p:sp>
       <p:sp>
         <p:nvSpPr>
-          <p:cNvPr id="6" name="Rectangle 5"/>
+          <p:cNvPr id="7" name="Rectangle 6"/>
           <p:cNvSpPr/>
           <p:nvPr/>
         </p:nvSpPr>
@@ -9604,7 +10293,7 @@
       </p:sp>
       <p:sp>
         <p:nvSpPr>
-          <p:cNvPr id="7" name="TextBox 6"/>
+          <p:cNvPr id="8" name="TextBox 7"/>
           <p:cNvSpPr txBox="1"/>
           <p:nvPr/>
         </p:nvSpPr>
@@ -9646,7 +10335,7 @@
       </p:sp>
       <p:sp>
         <p:nvSpPr>
-          <p:cNvPr id="8" name="Rectangle 7"/>
+          <p:cNvPr id="9" name="Rectangle 8"/>
           <p:cNvSpPr/>
           <p:nvPr/>
         </p:nvSpPr>
@@ -9695,7 +10384,7 @@
       </p:sp>
       <p:sp>
         <p:nvSpPr>
-          <p:cNvPr id="9" name="Rectangle 8"/>
+          <p:cNvPr id="10" name="Rectangle 9"/>
           <p:cNvSpPr/>
           <p:nvPr/>
         </p:nvSpPr>
@@ -9744,7 +10433,7 @@
       </p:sp>
       <p:sp>
         <p:nvSpPr>
-          <p:cNvPr id="10" name="TextBox 9"/>
+          <p:cNvPr id="11" name="TextBox 10"/>
           <p:cNvSpPr txBox="1"/>
           <p:nvPr/>
         </p:nvSpPr>
@@ -9786,7 +10475,7 @@
       </p:sp>
       <p:sp>
         <p:nvSpPr>
-          <p:cNvPr id="11" name="TextBox 10"/>
+          <p:cNvPr id="12" name="TextBox 11"/>
           <p:cNvSpPr txBox="1"/>
           <p:nvPr/>
         </p:nvSpPr>
@@ -9828,7 +10517,7 @@
       </p:sp>
       <p:sp>
         <p:nvSpPr>
-          <p:cNvPr id="12" name="Rectangle 11"/>
+          <p:cNvPr id="13" name="Rectangle 12"/>
           <p:cNvSpPr/>
           <p:nvPr/>
         </p:nvSpPr>
@@ -9877,7 +10566,7 @@
       </p:sp>
       <p:sp>
         <p:nvSpPr>
-          <p:cNvPr id="13" name="TextBox 12"/>
+          <p:cNvPr id="14" name="TextBox 13"/>
           <p:cNvSpPr txBox="1"/>
           <p:nvPr/>
         </p:nvSpPr>
@@ -9919,7 +10608,7 @@
       </p:sp>
       <p:sp>
         <p:nvSpPr>
-          <p:cNvPr id="14" name="TextBox 13"/>
+          <p:cNvPr id="15" name="TextBox 14"/>
           <p:cNvSpPr txBox="1"/>
           <p:nvPr/>
         </p:nvSpPr>
@@ -9954,14 +10643,14 @@
               <a:rPr>
                 <a:latin typeface="Inter"/>
               </a:rPr>
-              <a:t>Confidential — prepared for internal investment use · Data as of 2026-09-30</a:t>
-            </a:r>
-          </a:p>
-        </p:txBody>
-      </p:sp>
-      <p:sp>
-        <p:nvSpPr>
-          <p:cNvPr id="15" name="TextBox 14"/>
+              <a:t>Confidential — Investment Committee · Data as of 2026-09-30</a:t>
+            </a:r>
+          </a:p>
+        </p:txBody>
+      </p:sp>
+      <p:sp>
+        <p:nvSpPr>
+          <p:cNvPr id="16" name="TextBox 15"/>
           <p:cNvSpPr txBox="1"/>
           <p:nvPr/>
         </p:nvSpPr>
@@ -10077,7 +10766,7 @@
         <p:spPr>
           <a:xfrm>
             <a:off x="640080" y="329184"/>
-            <a:ext cx="9875520" cy="182880"/>
+            <a:ext cx="5303520" cy="182880"/>
           </a:xfrm>
           <a:prstGeom prst="rect">
             <a:avLst/>
@@ -10118,6 +10807,48 @@
         </p:nvSpPr>
         <p:spPr>
           <a:xfrm>
+            <a:off x="5897880" y="310896"/>
+            <a:ext cx="4800600" cy="256032"/>
+          </a:xfrm>
+          <a:prstGeom prst="rect">
+            <a:avLst/>
+          </a:prstGeom>
+          <a:noFill/>
+        </p:spPr>
+        <p:txBody>
+          <a:bodyPr wrap="none" lIns="9144" rIns="9144" tIns="9144" bIns="9144" anchor="t">
+            <a:spAutoFit/>
+          </a:bodyPr>
+          <a:lstStyle/>
+          <a:p>
+            <a:pPr algn="r">
+              <a:spcAft>
+                <a:spcPts val="0"/>
+              </a:spcAft>
+              <a:defRPr sz="680" b="1">
+                <a:solidFill>
+                  <a:srgbClr val="4F6B00"/>
+                </a:solidFill>
+                <a:latin typeface="Inter"/>
+              </a:defRPr>
+            </a:pPr>
+            <a:r>
+              <a:rPr>
+                <a:latin typeface="Inter"/>
+              </a:rPr>
+              <a:t>Illustrative, Gradient Maintained — demo data, not the client's holdings or managers</a:t>
+            </a:r>
+          </a:p>
+        </p:txBody>
+      </p:sp>
+      <p:sp>
+        <p:nvSpPr>
+          <p:cNvPr id="5" name="TextBox 4"/>
+          <p:cNvSpPr txBox="1"/>
+          <p:nvPr/>
+        </p:nvSpPr>
+        <p:spPr>
+          <a:xfrm>
             <a:off x="640080" y="566928"/>
             <a:ext cx="10058400" cy="530352"/>
           </a:xfrm>
@@ -10154,7 +10885,7 @@
       </p:sp>
       <p:sp>
         <p:nvSpPr>
-          <p:cNvPr id="5" name="Rectangle 4"/>
+          <p:cNvPr id="6" name="Rectangle 5"/>
           <p:cNvSpPr/>
           <p:nvPr/>
         </p:nvSpPr>
@@ -10203,7 +10934,7 @@
       </p:sp>
       <p:sp>
         <p:nvSpPr>
-          <p:cNvPr id="6" name="Rectangle 5"/>
+          <p:cNvPr id="7" name="Rectangle 6"/>
           <p:cNvSpPr/>
           <p:nvPr/>
         </p:nvSpPr>
@@ -10252,7 +10983,7 @@
       </p:sp>
       <p:sp>
         <p:nvSpPr>
-          <p:cNvPr id="7" name="TextBox 6"/>
+          <p:cNvPr id="8" name="TextBox 7"/>
           <p:cNvSpPr txBox="1"/>
           <p:nvPr/>
         </p:nvSpPr>
@@ -10294,7 +11025,7 @@
       </p:sp>
       <p:sp>
         <p:nvSpPr>
-          <p:cNvPr id="8" name="Rectangle 7"/>
+          <p:cNvPr id="9" name="Rectangle 8"/>
           <p:cNvSpPr/>
           <p:nvPr/>
         </p:nvSpPr>
@@ -10343,7 +11074,7 @@
       </p:sp>
       <p:sp>
         <p:nvSpPr>
-          <p:cNvPr id="9" name="Rectangle 8"/>
+          <p:cNvPr id="10" name="Rectangle 9"/>
           <p:cNvSpPr/>
           <p:nvPr/>
         </p:nvSpPr>
@@ -10392,7 +11123,7 @@
       </p:sp>
       <p:sp>
         <p:nvSpPr>
-          <p:cNvPr id="10" name="TextBox 9"/>
+          <p:cNvPr id="11" name="TextBox 10"/>
           <p:cNvSpPr txBox="1"/>
           <p:nvPr/>
         </p:nvSpPr>
@@ -10434,7 +11165,7 @@
       </p:sp>
       <p:sp>
         <p:nvSpPr>
-          <p:cNvPr id="11" name="TextBox 10"/>
+          <p:cNvPr id="12" name="TextBox 11"/>
           <p:cNvSpPr txBox="1"/>
           <p:nvPr/>
         </p:nvSpPr>
@@ -10476,7 +11207,7 @@
       </p:sp>
       <p:graphicFrame>
         <p:nvGraphicFramePr>
-          <p:cNvPr id="12" name="Table 11"/>
+          <p:cNvPr id="13" name="Table 12"/>
           <p:cNvGraphicFramePr>
             <a:graphicFrameLocks noGrp="1"/>
           </p:cNvGraphicFramePr>
@@ -10752,7 +11483,7 @@
       </p:graphicFrame>
       <p:sp>
         <p:nvSpPr>
-          <p:cNvPr id="13" name="Rectangle 12"/>
+          <p:cNvPr id="14" name="Rectangle 13"/>
           <p:cNvSpPr/>
           <p:nvPr/>
         </p:nvSpPr>
@@ -10801,7 +11532,7 @@
       </p:sp>
       <p:sp>
         <p:nvSpPr>
-          <p:cNvPr id="14" name="Rectangle 13"/>
+          <p:cNvPr id="15" name="Rectangle 14"/>
           <p:cNvSpPr/>
           <p:nvPr/>
         </p:nvSpPr>
@@ -10850,7 +11581,7 @@
       </p:sp>
       <p:sp>
         <p:nvSpPr>
-          <p:cNvPr id="15" name="TextBox 14"/>
+          <p:cNvPr id="16" name="TextBox 15"/>
           <p:cNvSpPr txBox="1"/>
           <p:nvPr/>
         </p:nvSpPr>
@@ -10892,7 +11623,7 @@
       </p:sp>
       <p:sp>
         <p:nvSpPr>
-          <p:cNvPr id="16" name="TextBox 15"/>
+          <p:cNvPr id="17" name="TextBox 16"/>
           <p:cNvSpPr txBox="1"/>
           <p:nvPr/>
         </p:nvSpPr>
@@ -10934,7 +11665,7 @@
       </p:sp>
       <p:sp>
         <p:nvSpPr>
-          <p:cNvPr id="17" name="Rectangle 16"/>
+          <p:cNvPr id="18" name="Rectangle 17"/>
           <p:cNvSpPr/>
           <p:nvPr/>
         </p:nvSpPr>
@@ -10983,7 +11714,7 @@
       </p:sp>
       <p:sp>
         <p:nvSpPr>
-          <p:cNvPr id="18" name="TextBox 17"/>
+          <p:cNvPr id="19" name="TextBox 18"/>
           <p:cNvSpPr txBox="1"/>
           <p:nvPr/>
         </p:nvSpPr>
@@ -11025,7 +11756,7 @@
       </p:sp>
       <p:sp>
         <p:nvSpPr>
-          <p:cNvPr id="19" name="TextBox 18"/>
+          <p:cNvPr id="20" name="TextBox 19"/>
           <p:cNvSpPr txBox="1"/>
           <p:nvPr/>
         </p:nvSpPr>
@@ -11060,14 +11791,14 @@
               <a:rPr>
                 <a:latin typeface="Inter"/>
               </a:rPr>
-              <a:t>Confidential — prepared for internal investment use · Data as of 2026-09-30</a:t>
-            </a:r>
-          </a:p>
-        </p:txBody>
-      </p:sp>
-      <p:sp>
-        <p:nvSpPr>
-          <p:cNvPr id="20" name="TextBox 19"/>
+              <a:t>Confidential — Investment Committee · Data as of 2026-09-30</a:t>
+            </a:r>
+          </a:p>
+        </p:txBody>
+      </p:sp>
+      <p:sp>
+        <p:nvSpPr>
+          <p:cNvPr id="21" name="TextBox 20"/>
           <p:cNvSpPr txBox="1"/>
           <p:nvPr/>
         </p:nvSpPr>
@@ -11183,7 +11914,7 @@
         <p:spPr>
           <a:xfrm>
             <a:off x="640080" y="329184"/>
-            <a:ext cx="9875520" cy="182880"/>
+            <a:ext cx="5303520" cy="182880"/>
           </a:xfrm>
           <a:prstGeom prst="rect">
             <a:avLst/>
@@ -11224,6 +11955,48 @@
         </p:nvSpPr>
         <p:spPr>
           <a:xfrm>
+            <a:off x="5897880" y="310896"/>
+            <a:ext cx="4800600" cy="256032"/>
+          </a:xfrm>
+          <a:prstGeom prst="rect">
+            <a:avLst/>
+          </a:prstGeom>
+          <a:noFill/>
+        </p:spPr>
+        <p:txBody>
+          <a:bodyPr wrap="none" lIns="9144" rIns="9144" tIns="9144" bIns="9144" anchor="t">
+            <a:spAutoFit/>
+          </a:bodyPr>
+          <a:lstStyle/>
+          <a:p>
+            <a:pPr algn="r">
+              <a:spcAft>
+                <a:spcPts val="0"/>
+              </a:spcAft>
+              <a:defRPr sz="680" b="1">
+                <a:solidFill>
+                  <a:srgbClr val="4F6B00"/>
+                </a:solidFill>
+                <a:latin typeface="Inter"/>
+              </a:defRPr>
+            </a:pPr>
+            <a:r>
+              <a:rPr>
+                <a:latin typeface="Inter"/>
+              </a:rPr>
+              <a:t>Illustrative, Gradient Maintained — demo data, not the client's holdings or managers</a:t>
+            </a:r>
+          </a:p>
+        </p:txBody>
+      </p:sp>
+      <p:sp>
+        <p:nvSpPr>
+          <p:cNvPr id="5" name="TextBox 4"/>
+          <p:cNvSpPr txBox="1"/>
+          <p:nvPr/>
+        </p:nvSpPr>
+        <p:spPr>
+          <a:xfrm>
             <a:off x="640080" y="566928"/>
             <a:ext cx="10058400" cy="530352"/>
           </a:xfrm>
@@ -11260,7 +12033,7 @@
       </p:sp>
       <p:sp>
         <p:nvSpPr>
-          <p:cNvPr id="5" name="Rectangle 4"/>
+          <p:cNvPr id="6" name="Rectangle 5"/>
           <p:cNvSpPr/>
           <p:nvPr/>
         </p:nvSpPr>
@@ -11309,7 +12082,7 @@
       </p:sp>
       <p:sp>
         <p:nvSpPr>
-          <p:cNvPr id="6" name="Rectangle 5"/>
+          <p:cNvPr id="7" name="Rectangle 6"/>
           <p:cNvSpPr/>
           <p:nvPr/>
         </p:nvSpPr>
@@ -11358,7 +12131,7 @@
       </p:sp>
       <p:sp>
         <p:nvSpPr>
-          <p:cNvPr id="7" name="TextBox 6"/>
+          <p:cNvPr id="8" name="TextBox 7"/>
           <p:cNvSpPr txBox="1"/>
           <p:nvPr/>
         </p:nvSpPr>
@@ -11400,7 +12173,7 @@
       </p:sp>
       <p:sp>
         <p:nvSpPr>
-          <p:cNvPr id="8" name="Rectangle 7"/>
+          <p:cNvPr id="9" name="Rectangle 8"/>
           <p:cNvSpPr/>
           <p:nvPr/>
         </p:nvSpPr>
@@ -11449,7 +12222,7 @@
       </p:sp>
       <p:sp>
         <p:nvSpPr>
-          <p:cNvPr id="9" name="Rectangle 8"/>
+          <p:cNvPr id="10" name="Rectangle 9"/>
           <p:cNvSpPr/>
           <p:nvPr/>
         </p:nvSpPr>
@@ -11498,7 +12271,7 @@
       </p:sp>
       <p:sp>
         <p:nvSpPr>
-          <p:cNvPr id="10" name="TextBox 9"/>
+          <p:cNvPr id="11" name="TextBox 10"/>
           <p:cNvSpPr txBox="1"/>
           <p:nvPr/>
         </p:nvSpPr>
@@ -11540,7 +12313,7 @@
       </p:sp>
       <p:sp>
         <p:nvSpPr>
-          <p:cNvPr id="11" name="TextBox 10"/>
+          <p:cNvPr id="12" name="TextBox 11"/>
           <p:cNvSpPr txBox="1"/>
           <p:nvPr/>
         </p:nvSpPr>
@@ -11582,7 +12355,7 @@
       </p:sp>
       <p:sp>
         <p:nvSpPr>
-          <p:cNvPr id="12" name="Rectangle 11"/>
+          <p:cNvPr id="13" name="Rectangle 12"/>
           <p:cNvSpPr/>
           <p:nvPr/>
         </p:nvSpPr>
@@ -11631,7 +12404,7 @@
       </p:sp>
       <p:sp>
         <p:nvSpPr>
-          <p:cNvPr id="13" name="TextBox 12"/>
+          <p:cNvPr id="14" name="TextBox 13"/>
           <p:cNvSpPr txBox="1"/>
           <p:nvPr/>
         </p:nvSpPr>
@@ -11673,7 +12446,7 @@
       </p:sp>
       <p:sp>
         <p:nvSpPr>
-          <p:cNvPr id="14" name="TextBox 13"/>
+          <p:cNvPr id="15" name="TextBox 14"/>
           <p:cNvSpPr txBox="1"/>
           <p:nvPr/>
         </p:nvSpPr>
@@ -11708,14 +12481,14 @@
               <a:rPr>
                 <a:latin typeface="Inter"/>
               </a:rPr>
-              <a:t>Confidential — prepared for internal investment use · Data as of 2026-09-30</a:t>
-            </a:r>
-          </a:p>
-        </p:txBody>
-      </p:sp>
-      <p:sp>
-        <p:nvSpPr>
-          <p:cNvPr id="15" name="TextBox 14"/>
+              <a:t>Confidential — Investment Committee · Data as of 2026-09-30</a:t>
+            </a:r>
+          </a:p>
+        </p:txBody>
+      </p:sp>
+      <p:sp>
+        <p:nvSpPr>
+          <p:cNvPr id="16" name="TextBox 15"/>
           <p:cNvSpPr txBox="1"/>
           <p:nvPr/>
         </p:nvSpPr>
@@ -11831,7 +12604,7 @@
         <p:spPr>
           <a:xfrm>
             <a:off x="640080" y="329184"/>
-            <a:ext cx="9875520" cy="182880"/>
+            <a:ext cx="5303520" cy="182880"/>
           </a:xfrm>
           <a:prstGeom prst="rect">
             <a:avLst/>
@@ -11872,6 +12645,48 @@
         </p:nvSpPr>
         <p:spPr>
           <a:xfrm>
+            <a:off x="5897880" y="310896"/>
+            <a:ext cx="4800600" cy="256032"/>
+          </a:xfrm>
+          <a:prstGeom prst="rect">
+            <a:avLst/>
+          </a:prstGeom>
+          <a:noFill/>
+        </p:spPr>
+        <p:txBody>
+          <a:bodyPr wrap="none" lIns="9144" rIns="9144" tIns="9144" bIns="9144" anchor="t">
+            <a:spAutoFit/>
+          </a:bodyPr>
+          <a:lstStyle/>
+          <a:p>
+            <a:pPr algn="r">
+              <a:spcAft>
+                <a:spcPts val="0"/>
+              </a:spcAft>
+              <a:defRPr sz="680" b="1">
+                <a:solidFill>
+                  <a:srgbClr val="4F6B00"/>
+                </a:solidFill>
+                <a:latin typeface="Inter"/>
+              </a:defRPr>
+            </a:pPr>
+            <a:r>
+              <a:rPr>
+                <a:latin typeface="Inter"/>
+              </a:rPr>
+              <a:t>Illustrative, Gradient Maintained — demo data, not the client's holdings or managers</a:t>
+            </a:r>
+          </a:p>
+        </p:txBody>
+      </p:sp>
+      <p:sp>
+        <p:nvSpPr>
+          <p:cNvPr id="5" name="TextBox 4"/>
+          <p:cNvSpPr txBox="1"/>
+          <p:nvPr/>
+        </p:nvSpPr>
+        <p:spPr>
+          <a:xfrm>
             <a:off x="640080" y="566928"/>
             <a:ext cx="10058400" cy="530352"/>
           </a:xfrm>
@@ -11908,7 +12723,7 @@
       </p:sp>
       <p:sp>
         <p:nvSpPr>
-          <p:cNvPr id="5" name="Rectangle 4"/>
+          <p:cNvPr id="6" name="Rectangle 5"/>
           <p:cNvSpPr/>
           <p:nvPr/>
         </p:nvSpPr>
@@ -11957,7 +12772,7 @@
       </p:sp>
       <p:sp>
         <p:nvSpPr>
-          <p:cNvPr id="6" name="Rectangle 5"/>
+          <p:cNvPr id="7" name="Rectangle 6"/>
           <p:cNvSpPr/>
           <p:nvPr/>
         </p:nvSpPr>
@@ -12006,7 +12821,7 @@
       </p:sp>
       <p:sp>
         <p:nvSpPr>
-          <p:cNvPr id="7" name="TextBox 6"/>
+          <p:cNvPr id="8" name="TextBox 7"/>
           <p:cNvSpPr txBox="1"/>
           <p:nvPr/>
         </p:nvSpPr>
@@ -12048,7 +12863,7 @@
       </p:sp>
       <p:sp>
         <p:nvSpPr>
-          <p:cNvPr id="8" name="TextBox 7"/>
+          <p:cNvPr id="9" name="TextBox 8"/>
           <p:cNvSpPr txBox="1"/>
           <p:nvPr/>
         </p:nvSpPr>
@@ -12090,7 +12905,7 @@
       </p:sp>
       <p:graphicFrame>
         <p:nvGraphicFramePr>
-          <p:cNvPr id="9" name="Table 8"/>
+          <p:cNvPr id="10" name="Table 9"/>
           <p:cNvGraphicFramePr>
             <a:graphicFrameLocks noGrp="1"/>
           </p:cNvGraphicFramePr>
@@ -12443,7 +13258,7 @@
       </p:graphicFrame>
       <p:sp>
         <p:nvSpPr>
-          <p:cNvPr id="10" name="Rectangle 9"/>
+          <p:cNvPr id="11" name="Rectangle 10"/>
           <p:cNvSpPr/>
           <p:nvPr/>
         </p:nvSpPr>
@@ -12492,7 +13307,7 @@
       </p:sp>
       <p:sp>
         <p:nvSpPr>
-          <p:cNvPr id="11" name="TextBox 10"/>
+          <p:cNvPr id="12" name="TextBox 11"/>
           <p:cNvSpPr txBox="1"/>
           <p:nvPr/>
         </p:nvSpPr>
@@ -12534,7 +13349,7 @@
       </p:sp>
       <p:sp>
         <p:nvSpPr>
-          <p:cNvPr id="12" name="TextBox 11"/>
+          <p:cNvPr id="13" name="TextBox 12"/>
           <p:cNvSpPr txBox="1"/>
           <p:nvPr/>
         </p:nvSpPr>
@@ -12569,14 +13384,14 @@
               <a:rPr>
                 <a:latin typeface="Inter"/>
               </a:rPr>
-              <a:t>Confidential — prepared for internal investment use · Data as of 2026-09-30</a:t>
-            </a:r>
-          </a:p>
-        </p:txBody>
-      </p:sp>
-      <p:sp>
-        <p:nvSpPr>
-          <p:cNvPr id="13" name="TextBox 12"/>
+              <a:t>Confidential — Investment Committee · Data as of 2026-09-30</a:t>
+            </a:r>
+          </a:p>
+        </p:txBody>
+      </p:sp>
+      <p:sp>
+        <p:nvSpPr>
+          <p:cNvPr id="14" name="TextBox 13"/>
           <p:cNvSpPr txBox="1"/>
           <p:nvPr/>
         </p:nvSpPr>
@@ -12692,7 +13507,7 @@
         <p:spPr>
           <a:xfrm>
             <a:off x="640080" y="329184"/>
-            <a:ext cx="9875520" cy="182880"/>
+            <a:ext cx="5303520" cy="182880"/>
           </a:xfrm>
           <a:prstGeom prst="rect">
             <a:avLst/>
@@ -12733,6 +13548,48 @@
         </p:nvSpPr>
         <p:spPr>
           <a:xfrm>
+            <a:off x="5897880" y="310896"/>
+            <a:ext cx="4800600" cy="256032"/>
+          </a:xfrm>
+          <a:prstGeom prst="rect">
+            <a:avLst/>
+          </a:prstGeom>
+          <a:noFill/>
+        </p:spPr>
+        <p:txBody>
+          <a:bodyPr wrap="none" lIns="9144" rIns="9144" tIns="9144" bIns="9144" anchor="t">
+            <a:spAutoFit/>
+          </a:bodyPr>
+          <a:lstStyle/>
+          <a:p>
+            <a:pPr algn="r">
+              <a:spcAft>
+                <a:spcPts val="0"/>
+              </a:spcAft>
+              <a:defRPr sz="680" b="1">
+                <a:solidFill>
+                  <a:srgbClr val="4F6B00"/>
+                </a:solidFill>
+                <a:latin typeface="Inter"/>
+              </a:defRPr>
+            </a:pPr>
+            <a:r>
+              <a:rPr>
+                <a:latin typeface="Inter"/>
+              </a:rPr>
+              <a:t>Illustrative, Gradient Maintained — demo data, not the client's holdings or managers</a:t>
+            </a:r>
+          </a:p>
+        </p:txBody>
+      </p:sp>
+      <p:sp>
+        <p:nvSpPr>
+          <p:cNvPr id="5" name="TextBox 4"/>
+          <p:cNvSpPr txBox="1"/>
+          <p:nvPr/>
+        </p:nvSpPr>
+        <p:spPr>
+          <a:xfrm>
             <a:off x="640080" y="566928"/>
             <a:ext cx="10058400" cy="530352"/>
           </a:xfrm>
@@ -12769,7 +13626,7 @@
       </p:sp>
       <p:sp>
         <p:nvSpPr>
-          <p:cNvPr id="5" name="Rectangle 4"/>
+          <p:cNvPr id="6" name="Rectangle 5"/>
           <p:cNvSpPr/>
           <p:nvPr/>
         </p:nvSpPr>
@@ -12818,7 +13675,7 @@
       </p:sp>
       <p:sp>
         <p:nvSpPr>
-          <p:cNvPr id="6" name="Rectangle 5"/>
+          <p:cNvPr id="7" name="Rectangle 6"/>
           <p:cNvSpPr/>
           <p:nvPr/>
         </p:nvSpPr>
@@ -12867,7 +13724,7 @@
       </p:sp>
       <p:sp>
         <p:nvSpPr>
-          <p:cNvPr id="7" name="TextBox 6"/>
+          <p:cNvPr id="8" name="TextBox 7"/>
           <p:cNvSpPr txBox="1"/>
           <p:nvPr/>
         </p:nvSpPr>
@@ -12909,7 +13766,7 @@
       </p:sp>
       <p:sp>
         <p:nvSpPr>
-          <p:cNvPr id="8" name="TextBox 7"/>
+          <p:cNvPr id="9" name="TextBox 8"/>
           <p:cNvSpPr txBox="1"/>
           <p:nvPr/>
         </p:nvSpPr>
@@ -12951,7 +13808,7 @@
       </p:sp>
       <p:graphicFrame>
         <p:nvGraphicFramePr>
-          <p:cNvPr id="9" name="Chart 8"/>
+          <p:cNvPr id="10" name="Chart 9"/>
           <p:cNvGraphicFramePr>
             <a:graphicFrameLocks noGrp="1"/>
           </p:cNvGraphicFramePr>
@@ -12969,7 +13826,7 @@
       </p:graphicFrame>
       <p:sp>
         <p:nvSpPr>
-          <p:cNvPr id="10" name="Rectangle 9"/>
+          <p:cNvPr id="11" name="Rectangle 10"/>
           <p:cNvSpPr/>
           <p:nvPr/>
         </p:nvSpPr>
@@ -13018,7 +13875,7 @@
       </p:sp>
       <p:sp>
         <p:nvSpPr>
-          <p:cNvPr id="11" name="TextBox 10"/>
+          <p:cNvPr id="12" name="TextBox 11"/>
           <p:cNvSpPr txBox="1"/>
           <p:nvPr/>
         </p:nvSpPr>
@@ -13060,7 +13917,7 @@
       </p:sp>
       <p:graphicFrame>
         <p:nvGraphicFramePr>
-          <p:cNvPr id="12" name="Chart 11"/>
+          <p:cNvPr id="13" name="Chart 12"/>
           <p:cNvGraphicFramePr>
             <a:graphicFrameLocks noGrp="1"/>
           </p:cNvGraphicFramePr>
@@ -13078,7 +13935,7 @@
       </p:graphicFrame>
       <p:sp>
         <p:nvSpPr>
-          <p:cNvPr id="13" name="Rectangle 12"/>
+          <p:cNvPr id="14" name="Rectangle 13"/>
           <p:cNvSpPr/>
           <p:nvPr/>
         </p:nvSpPr>
@@ -13127,7 +13984,7 @@
       </p:sp>
       <p:sp>
         <p:nvSpPr>
-          <p:cNvPr id="14" name="TextBox 13"/>
+          <p:cNvPr id="15" name="TextBox 14"/>
           <p:cNvSpPr txBox="1"/>
           <p:nvPr/>
         </p:nvSpPr>
@@ -13169,7 +14026,7 @@
       </p:sp>
       <p:sp>
         <p:nvSpPr>
-          <p:cNvPr id="15" name="TextBox 14"/>
+          <p:cNvPr id="16" name="TextBox 15"/>
           <p:cNvSpPr txBox="1"/>
           <p:nvPr/>
         </p:nvSpPr>
@@ -13204,14 +14061,14 @@
               <a:rPr>
                 <a:latin typeface="Inter"/>
               </a:rPr>
-              <a:t>Confidential — prepared for internal investment use · Data as of 2026-09-30</a:t>
-            </a:r>
-          </a:p>
-        </p:txBody>
-      </p:sp>
-      <p:sp>
-        <p:nvSpPr>
-          <p:cNvPr id="16" name="TextBox 15"/>
+              <a:t>Confidential — Investment Committee · Data as of 2026-09-30</a:t>
+            </a:r>
+          </a:p>
+        </p:txBody>
+      </p:sp>
+      <p:sp>
+        <p:nvSpPr>
+          <p:cNvPr id="17" name="TextBox 16"/>
           <p:cNvSpPr txBox="1"/>
           <p:nvPr/>
         </p:nvSpPr>
@@ -13327,7 +14184,7 @@
         <p:spPr>
           <a:xfrm>
             <a:off x="640080" y="329184"/>
-            <a:ext cx="9875520" cy="182880"/>
+            <a:ext cx="5303520" cy="182880"/>
           </a:xfrm>
           <a:prstGeom prst="rect">
             <a:avLst/>
@@ -13368,6 +14225,48 @@
         </p:nvSpPr>
         <p:spPr>
           <a:xfrm>
+            <a:off x="5897880" y="310896"/>
+            <a:ext cx="4800600" cy="256032"/>
+          </a:xfrm>
+          <a:prstGeom prst="rect">
+            <a:avLst/>
+          </a:prstGeom>
+          <a:noFill/>
+        </p:spPr>
+        <p:txBody>
+          <a:bodyPr wrap="none" lIns="9144" rIns="9144" tIns="9144" bIns="9144" anchor="t">
+            <a:spAutoFit/>
+          </a:bodyPr>
+          <a:lstStyle/>
+          <a:p>
+            <a:pPr algn="r">
+              <a:spcAft>
+                <a:spcPts val="0"/>
+              </a:spcAft>
+              <a:defRPr sz="680" b="1">
+                <a:solidFill>
+                  <a:srgbClr val="4F6B00"/>
+                </a:solidFill>
+                <a:latin typeface="Inter"/>
+              </a:defRPr>
+            </a:pPr>
+            <a:r>
+              <a:rPr>
+                <a:latin typeface="Inter"/>
+              </a:rPr>
+              <a:t>Illustrative, Gradient Maintained — demo data, not the client's holdings or managers</a:t>
+            </a:r>
+          </a:p>
+        </p:txBody>
+      </p:sp>
+      <p:sp>
+        <p:nvSpPr>
+          <p:cNvPr id="5" name="TextBox 4"/>
+          <p:cNvSpPr txBox="1"/>
+          <p:nvPr/>
+        </p:nvSpPr>
+        <p:spPr>
+          <a:xfrm>
             <a:off x="640080" y="566928"/>
             <a:ext cx="10058400" cy="530352"/>
           </a:xfrm>
@@ -13404,7 +14303,7 @@
       </p:sp>
       <p:sp>
         <p:nvSpPr>
-          <p:cNvPr id="5" name="Rectangle 4"/>
+          <p:cNvPr id="6" name="Rectangle 5"/>
           <p:cNvSpPr/>
           <p:nvPr/>
         </p:nvSpPr>
@@ -13453,7 +14352,7 @@
       </p:sp>
       <p:sp>
         <p:nvSpPr>
-          <p:cNvPr id="6" name="Rectangle 5"/>
+          <p:cNvPr id="7" name="Rectangle 6"/>
           <p:cNvSpPr/>
           <p:nvPr/>
         </p:nvSpPr>
@@ -13502,7 +14401,7 @@
       </p:sp>
       <p:sp>
         <p:nvSpPr>
-          <p:cNvPr id="7" name="TextBox 6"/>
+          <p:cNvPr id="8" name="TextBox 7"/>
           <p:cNvSpPr txBox="1"/>
           <p:nvPr/>
         </p:nvSpPr>
@@ -13544,7 +14443,7 @@
       </p:sp>
       <p:sp>
         <p:nvSpPr>
-          <p:cNvPr id="8" name="Rectangle 7"/>
+          <p:cNvPr id="9" name="Rectangle 8"/>
           <p:cNvSpPr/>
           <p:nvPr/>
         </p:nvSpPr>
@@ -13593,7 +14492,7 @@
       </p:sp>
       <p:sp>
         <p:nvSpPr>
-          <p:cNvPr id="9" name="Rectangle 8"/>
+          <p:cNvPr id="10" name="Rectangle 9"/>
           <p:cNvSpPr/>
           <p:nvPr/>
         </p:nvSpPr>
@@ -13642,7 +14541,7 @@
       </p:sp>
       <p:sp>
         <p:nvSpPr>
-          <p:cNvPr id="10" name="TextBox 9"/>
+          <p:cNvPr id="11" name="TextBox 10"/>
           <p:cNvSpPr txBox="1"/>
           <p:nvPr/>
         </p:nvSpPr>
@@ -13684,7 +14583,7 @@
       </p:sp>
       <p:sp>
         <p:nvSpPr>
-          <p:cNvPr id="11" name="TextBox 10"/>
+          <p:cNvPr id="12" name="TextBox 11"/>
           <p:cNvSpPr txBox="1"/>
           <p:nvPr/>
         </p:nvSpPr>
@@ -13726,7 +14625,7 @@
       </p:sp>
       <p:sp>
         <p:nvSpPr>
-          <p:cNvPr id="12" name="Rectangle 11"/>
+          <p:cNvPr id="13" name="Rectangle 12"/>
           <p:cNvSpPr/>
           <p:nvPr/>
         </p:nvSpPr>
@@ -13775,7 +14674,7 @@
       </p:sp>
       <p:sp>
         <p:nvSpPr>
-          <p:cNvPr id="13" name="Rectangle 12"/>
+          <p:cNvPr id="14" name="Rectangle 13"/>
           <p:cNvSpPr/>
           <p:nvPr/>
         </p:nvSpPr>
@@ -13824,7 +14723,7 @@
       </p:sp>
       <p:sp>
         <p:nvSpPr>
-          <p:cNvPr id="14" name="TextBox 13"/>
+          <p:cNvPr id="15" name="TextBox 14"/>
           <p:cNvSpPr txBox="1"/>
           <p:nvPr/>
         </p:nvSpPr>
@@ -13866,7 +14765,7 @@
       </p:sp>
       <p:sp>
         <p:nvSpPr>
-          <p:cNvPr id="15" name="TextBox 14"/>
+          <p:cNvPr id="16" name="TextBox 15"/>
           <p:cNvSpPr txBox="1"/>
           <p:nvPr/>
         </p:nvSpPr>
@@ -13908,7 +14807,7 @@
       </p:sp>
       <p:sp>
         <p:nvSpPr>
-          <p:cNvPr id="16" name="TextBox 15"/>
+          <p:cNvPr id="17" name="TextBox 16"/>
           <p:cNvSpPr txBox="1"/>
           <p:nvPr/>
         </p:nvSpPr>
@@ -13950,7 +14849,7 @@
       </p:sp>
       <p:sp>
         <p:nvSpPr>
-          <p:cNvPr id="17" name="Rectangle 16"/>
+          <p:cNvPr id="18" name="Rectangle 17"/>
           <p:cNvSpPr/>
           <p:nvPr/>
         </p:nvSpPr>
@@ -13999,7 +14898,7 @@
       </p:sp>
       <p:sp>
         <p:nvSpPr>
-          <p:cNvPr id="18" name="Rectangle 17"/>
+          <p:cNvPr id="19" name="Rectangle 18"/>
           <p:cNvSpPr/>
           <p:nvPr/>
         </p:nvSpPr>
@@ -14048,7 +14947,7 @@
       </p:sp>
       <p:sp>
         <p:nvSpPr>
-          <p:cNvPr id="19" name="TextBox 18"/>
+          <p:cNvPr id="20" name="TextBox 19"/>
           <p:cNvSpPr txBox="1"/>
           <p:nvPr/>
         </p:nvSpPr>
@@ -14090,7 +14989,7 @@
       </p:sp>
       <p:sp>
         <p:nvSpPr>
-          <p:cNvPr id="20" name="TextBox 19"/>
+          <p:cNvPr id="21" name="TextBox 20"/>
           <p:cNvSpPr txBox="1"/>
           <p:nvPr/>
         </p:nvSpPr>
@@ -14132,7 +15031,7 @@
       </p:sp>
       <p:sp>
         <p:nvSpPr>
-          <p:cNvPr id="21" name="TextBox 20"/>
+          <p:cNvPr id="22" name="TextBox 21"/>
           <p:cNvSpPr txBox="1"/>
           <p:nvPr/>
         </p:nvSpPr>
@@ -14174,7 +15073,7 @@
       </p:sp>
       <p:sp>
         <p:nvSpPr>
-          <p:cNvPr id="22" name="Rectangle 21"/>
+          <p:cNvPr id="23" name="Rectangle 22"/>
           <p:cNvSpPr/>
           <p:nvPr/>
         </p:nvSpPr>
@@ -14223,7 +15122,7 @@
       </p:sp>
       <p:sp>
         <p:nvSpPr>
-          <p:cNvPr id="23" name="Rectangle 22"/>
+          <p:cNvPr id="24" name="Rectangle 23"/>
           <p:cNvSpPr/>
           <p:nvPr/>
         </p:nvSpPr>
@@ -14272,7 +15171,7 @@
       </p:sp>
       <p:sp>
         <p:nvSpPr>
-          <p:cNvPr id="24" name="TextBox 23"/>
+          <p:cNvPr id="25" name="TextBox 24"/>
           <p:cNvSpPr txBox="1"/>
           <p:nvPr/>
         </p:nvSpPr>
@@ -14314,7 +15213,7 @@
       </p:sp>
       <p:sp>
         <p:nvSpPr>
-          <p:cNvPr id="25" name="TextBox 24"/>
+          <p:cNvPr id="26" name="TextBox 25"/>
           <p:cNvSpPr txBox="1"/>
           <p:nvPr/>
         </p:nvSpPr>
@@ -14356,7 +15255,7 @@
       </p:sp>
       <p:sp>
         <p:nvSpPr>
-          <p:cNvPr id="26" name="TextBox 25"/>
+          <p:cNvPr id="27" name="TextBox 26"/>
           <p:cNvSpPr txBox="1"/>
           <p:nvPr/>
         </p:nvSpPr>
@@ -14398,7 +15297,7 @@
       </p:sp>
       <p:sp>
         <p:nvSpPr>
-          <p:cNvPr id="27" name="Rectangle 26"/>
+          <p:cNvPr id="28" name="Rectangle 27"/>
           <p:cNvSpPr/>
           <p:nvPr/>
         </p:nvSpPr>
@@ -14447,7 +15346,7 @@
       </p:sp>
       <p:sp>
         <p:nvSpPr>
-          <p:cNvPr id="28" name="Rectangle 27"/>
+          <p:cNvPr id="29" name="Rectangle 28"/>
           <p:cNvSpPr/>
           <p:nvPr/>
         </p:nvSpPr>
@@ -14496,7 +15395,7 @@
       </p:sp>
       <p:sp>
         <p:nvSpPr>
-          <p:cNvPr id="29" name="TextBox 28"/>
+          <p:cNvPr id="30" name="TextBox 29"/>
           <p:cNvSpPr txBox="1"/>
           <p:nvPr/>
         </p:nvSpPr>
@@ -14538,7 +15437,7 @@
       </p:sp>
       <p:sp>
         <p:nvSpPr>
-          <p:cNvPr id="30" name="TextBox 29"/>
+          <p:cNvPr id="31" name="TextBox 30"/>
           <p:cNvSpPr txBox="1"/>
           <p:nvPr/>
         </p:nvSpPr>
@@ -14580,7 +15479,7 @@
       </p:sp>
       <p:sp>
         <p:nvSpPr>
-          <p:cNvPr id="31" name="TextBox 30"/>
+          <p:cNvPr id="32" name="TextBox 31"/>
           <p:cNvSpPr txBox="1"/>
           <p:nvPr/>
         </p:nvSpPr>
@@ -14622,7 +15521,7 @@
       </p:sp>
       <p:sp>
         <p:nvSpPr>
-          <p:cNvPr id="32" name="Rectangle 31"/>
+          <p:cNvPr id="33" name="Rectangle 32"/>
           <p:cNvSpPr/>
           <p:nvPr/>
         </p:nvSpPr>
@@ -14671,7 +15570,7 @@
       </p:sp>
       <p:sp>
         <p:nvSpPr>
-          <p:cNvPr id="33" name="TextBox 32"/>
+          <p:cNvPr id="34" name="TextBox 33"/>
           <p:cNvSpPr txBox="1"/>
           <p:nvPr/>
         </p:nvSpPr>
@@ -14713,7 +15612,7 @@
       </p:sp>
       <p:sp>
         <p:nvSpPr>
-          <p:cNvPr id="34" name="TextBox 33"/>
+          <p:cNvPr id="35" name="TextBox 34"/>
           <p:cNvSpPr txBox="1"/>
           <p:nvPr/>
         </p:nvSpPr>
@@ -14755,7 +15654,7 @@
       </p:sp>
       <p:sp>
         <p:nvSpPr>
-          <p:cNvPr id="35" name="Rectangle 34"/>
+          <p:cNvPr id="36" name="Rectangle 35"/>
           <p:cNvSpPr/>
           <p:nvPr/>
         </p:nvSpPr>
@@ -14804,7 +15703,7 @@
       </p:sp>
       <p:sp>
         <p:nvSpPr>
-          <p:cNvPr id="36" name="TextBox 35"/>
+          <p:cNvPr id="37" name="TextBox 36"/>
           <p:cNvSpPr txBox="1"/>
           <p:nvPr/>
         </p:nvSpPr>
@@ -14846,7 +15745,7 @@
       </p:sp>
       <p:sp>
         <p:nvSpPr>
-          <p:cNvPr id="37" name="TextBox 36"/>
+          <p:cNvPr id="38" name="TextBox 37"/>
           <p:cNvSpPr txBox="1"/>
           <p:nvPr/>
         </p:nvSpPr>
@@ -14881,14 +15780,14 @@
               <a:rPr>
                 <a:latin typeface="Inter"/>
               </a:rPr>
-              <a:t>Confidential — prepared for internal investment use · Data as of 2026-09-30</a:t>
-            </a:r>
-          </a:p>
-        </p:txBody>
-      </p:sp>
-      <p:sp>
-        <p:nvSpPr>
-          <p:cNvPr id="38" name="TextBox 37"/>
+              <a:t>Confidential — Investment Committee · Data as of 2026-09-30</a:t>
+            </a:r>
+          </a:p>
+        </p:txBody>
+      </p:sp>
+      <p:sp>
+        <p:nvSpPr>
+          <p:cNvPr id="39" name="TextBox 38"/>
           <p:cNvSpPr txBox="1"/>
           <p:nvPr/>
         </p:nvSpPr>
@@ -15004,7 +15903,7 @@
         <p:spPr>
           <a:xfrm>
             <a:off x="640080" y="329184"/>
-            <a:ext cx="9875520" cy="182880"/>
+            <a:ext cx="5303520" cy="182880"/>
           </a:xfrm>
           <a:prstGeom prst="rect">
             <a:avLst/>
@@ -15045,6 +15944,48 @@
         </p:nvSpPr>
         <p:spPr>
           <a:xfrm>
+            <a:off x="5897880" y="310896"/>
+            <a:ext cx="4800600" cy="256032"/>
+          </a:xfrm>
+          <a:prstGeom prst="rect">
+            <a:avLst/>
+          </a:prstGeom>
+          <a:noFill/>
+        </p:spPr>
+        <p:txBody>
+          <a:bodyPr wrap="none" lIns="9144" rIns="9144" tIns="9144" bIns="9144" anchor="t">
+            <a:spAutoFit/>
+          </a:bodyPr>
+          <a:lstStyle/>
+          <a:p>
+            <a:pPr algn="r">
+              <a:spcAft>
+                <a:spcPts val="0"/>
+              </a:spcAft>
+              <a:defRPr sz="680" b="1">
+                <a:solidFill>
+                  <a:srgbClr val="4F6B00"/>
+                </a:solidFill>
+                <a:latin typeface="Inter"/>
+              </a:defRPr>
+            </a:pPr>
+            <a:r>
+              <a:rPr>
+                <a:latin typeface="Inter"/>
+              </a:rPr>
+              <a:t>Illustrative, Gradient Maintained — demo data, not the client's holdings or managers</a:t>
+            </a:r>
+          </a:p>
+        </p:txBody>
+      </p:sp>
+      <p:sp>
+        <p:nvSpPr>
+          <p:cNvPr id="5" name="TextBox 4"/>
+          <p:cNvSpPr txBox="1"/>
+          <p:nvPr/>
+        </p:nvSpPr>
+        <p:spPr>
+          <a:xfrm>
             <a:off x="640080" y="566928"/>
             <a:ext cx="10058400" cy="530352"/>
           </a:xfrm>
@@ -15081,7 +16022,7 @@
       </p:sp>
       <p:sp>
         <p:nvSpPr>
-          <p:cNvPr id="5" name="Rectangle 4"/>
+          <p:cNvPr id="6" name="Rectangle 5"/>
           <p:cNvSpPr/>
           <p:nvPr/>
         </p:nvSpPr>
@@ -15130,7 +16071,7 @@
       </p:sp>
       <p:sp>
         <p:nvSpPr>
-          <p:cNvPr id="6" name="Rectangle 5"/>
+          <p:cNvPr id="7" name="Rectangle 6"/>
           <p:cNvSpPr/>
           <p:nvPr/>
         </p:nvSpPr>
@@ -15179,7 +16120,7 @@
       </p:sp>
       <p:sp>
         <p:nvSpPr>
-          <p:cNvPr id="7" name="TextBox 6"/>
+          <p:cNvPr id="8" name="TextBox 7"/>
           <p:cNvSpPr txBox="1"/>
           <p:nvPr/>
         </p:nvSpPr>
@@ -15221,7 +16162,7 @@
       </p:sp>
       <p:sp>
         <p:nvSpPr>
-          <p:cNvPr id="8" name="Rectangle 7"/>
+          <p:cNvPr id="9" name="Rectangle 8"/>
           <p:cNvSpPr/>
           <p:nvPr/>
         </p:nvSpPr>
@@ -15270,7 +16211,7 @@
       </p:sp>
       <p:sp>
         <p:nvSpPr>
-          <p:cNvPr id="9" name="Rectangle 8"/>
+          <p:cNvPr id="10" name="Rectangle 9"/>
           <p:cNvSpPr/>
           <p:nvPr/>
         </p:nvSpPr>
@@ -15319,7 +16260,7 @@
       </p:sp>
       <p:sp>
         <p:nvSpPr>
-          <p:cNvPr id="10" name="TextBox 9"/>
+          <p:cNvPr id="11" name="TextBox 10"/>
           <p:cNvSpPr txBox="1"/>
           <p:nvPr/>
         </p:nvSpPr>
@@ -15361,7 +16302,7 @@
       </p:sp>
       <p:sp>
         <p:nvSpPr>
-          <p:cNvPr id="11" name="TextBox 10"/>
+          <p:cNvPr id="12" name="TextBox 11"/>
           <p:cNvSpPr txBox="1"/>
           <p:nvPr/>
         </p:nvSpPr>
@@ -15403,7 +16344,7 @@
       </p:sp>
       <p:graphicFrame>
         <p:nvGraphicFramePr>
-          <p:cNvPr id="12" name="Table 11"/>
+          <p:cNvPr id="13" name="Table 12"/>
           <p:cNvGraphicFramePr>
             <a:graphicFrameLocks noGrp="1"/>
           </p:cNvGraphicFramePr>
@@ -15845,7 +16786,7 @@
       </p:graphicFrame>
       <p:sp>
         <p:nvSpPr>
-          <p:cNvPr id="13" name="Rectangle 12"/>
+          <p:cNvPr id="14" name="Rectangle 13"/>
           <p:cNvSpPr/>
           <p:nvPr/>
         </p:nvSpPr>
@@ -15894,7 +16835,7 @@
       </p:sp>
       <p:sp>
         <p:nvSpPr>
-          <p:cNvPr id="14" name="Rectangle 13"/>
+          <p:cNvPr id="15" name="Rectangle 14"/>
           <p:cNvSpPr/>
           <p:nvPr/>
         </p:nvSpPr>
@@ -15943,7 +16884,7 @@
       </p:sp>
       <p:sp>
         <p:nvSpPr>
-          <p:cNvPr id="15" name="TextBox 14"/>
+          <p:cNvPr id="16" name="TextBox 15"/>
           <p:cNvSpPr txBox="1"/>
           <p:nvPr/>
         </p:nvSpPr>
@@ -15985,7 +16926,7 @@
       </p:sp>
       <p:sp>
         <p:nvSpPr>
-          <p:cNvPr id="16" name="TextBox 15"/>
+          <p:cNvPr id="17" name="TextBox 16"/>
           <p:cNvSpPr txBox="1"/>
           <p:nvPr/>
         </p:nvSpPr>
@@ -16027,7 +16968,7 @@
       </p:sp>
       <p:sp>
         <p:nvSpPr>
-          <p:cNvPr id="17" name="Rectangle 16"/>
+          <p:cNvPr id="18" name="Rectangle 17"/>
           <p:cNvSpPr/>
           <p:nvPr/>
         </p:nvSpPr>
@@ -16076,7 +17017,7 @@
       </p:sp>
       <p:sp>
         <p:nvSpPr>
-          <p:cNvPr id="18" name="TextBox 17"/>
+          <p:cNvPr id="19" name="TextBox 18"/>
           <p:cNvSpPr txBox="1"/>
           <p:nvPr/>
         </p:nvSpPr>
@@ -16118,7 +17059,7 @@
       </p:sp>
       <p:sp>
         <p:nvSpPr>
-          <p:cNvPr id="19" name="TextBox 18"/>
+          <p:cNvPr id="20" name="TextBox 19"/>
           <p:cNvSpPr txBox="1"/>
           <p:nvPr/>
         </p:nvSpPr>
@@ -16153,14 +17094,14 @@
               <a:rPr>
                 <a:latin typeface="Inter"/>
               </a:rPr>
-              <a:t>Confidential — prepared for internal investment use · Data as of 2026-09-30</a:t>
-            </a:r>
-          </a:p>
-        </p:txBody>
-      </p:sp>
-      <p:sp>
-        <p:nvSpPr>
-          <p:cNvPr id="20" name="TextBox 19"/>
+              <a:t>Confidential — Investment Committee · Data as of 2026-09-30</a:t>
+            </a:r>
+          </a:p>
+        </p:txBody>
+      </p:sp>
+      <p:sp>
+        <p:nvSpPr>
+          <p:cNvPr id="21" name="TextBox 20"/>
           <p:cNvSpPr txBox="1"/>
           <p:nvPr/>
         </p:nvSpPr>
@@ -16276,7 +17217,7 @@
         <p:spPr>
           <a:xfrm>
             <a:off x="640080" y="329184"/>
-            <a:ext cx="9875520" cy="182880"/>
+            <a:ext cx="5303520" cy="182880"/>
           </a:xfrm>
           <a:prstGeom prst="rect">
             <a:avLst/>
@@ -16317,6 +17258,48 @@
         </p:nvSpPr>
         <p:spPr>
           <a:xfrm>
+            <a:off x="5897880" y="310896"/>
+            <a:ext cx="4800600" cy="256032"/>
+          </a:xfrm>
+          <a:prstGeom prst="rect">
+            <a:avLst/>
+          </a:prstGeom>
+          <a:noFill/>
+        </p:spPr>
+        <p:txBody>
+          <a:bodyPr wrap="none" lIns="9144" rIns="9144" tIns="9144" bIns="9144" anchor="t">
+            <a:spAutoFit/>
+          </a:bodyPr>
+          <a:lstStyle/>
+          <a:p>
+            <a:pPr algn="r">
+              <a:spcAft>
+                <a:spcPts val="0"/>
+              </a:spcAft>
+              <a:defRPr sz="680" b="1">
+                <a:solidFill>
+                  <a:srgbClr val="4F6B00"/>
+                </a:solidFill>
+                <a:latin typeface="Inter"/>
+              </a:defRPr>
+            </a:pPr>
+            <a:r>
+              <a:rPr>
+                <a:latin typeface="Inter"/>
+              </a:rPr>
+              <a:t>Illustrative, Gradient Maintained — demo data, not the client's holdings or managers</a:t>
+            </a:r>
+          </a:p>
+        </p:txBody>
+      </p:sp>
+      <p:sp>
+        <p:nvSpPr>
+          <p:cNvPr id="5" name="TextBox 4"/>
+          <p:cNvSpPr txBox="1"/>
+          <p:nvPr/>
+        </p:nvSpPr>
+        <p:spPr>
+          <a:xfrm>
             <a:off x="640080" y="566928"/>
             <a:ext cx="10058400" cy="530352"/>
           </a:xfrm>
@@ -16353,7 +17336,7 @@
       </p:sp>
       <p:sp>
         <p:nvSpPr>
-          <p:cNvPr id="5" name="Rectangle 4"/>
+          <p:cNvPr id="6" name="Rectangle 5"/>
           <p:cNvSpPr/>
           <p:nvPr/>
         </p:nvSpPr>
@@ -16402,7 +17385,7 @@
       </p:sp>
       <p:sp>
         <p:nvSpPr>
-          <p:cNvPr id="6" name="Rectangle 5"/>
+          <p:cNvPr id="7" name="Rectangle 6"/>
           <p:cNvSpPr/>
           <p:nvPr/>
         </p:nvSpPr>
@@ -16451,7 +17434,7 @@
       </p:sp>
       <p:sp>
         <p:nvSpPr>
-          <p:cNvPr id="7" name="TextBox 6"/>
+          <p:cNvPr id="8" name="TextBox 7"/>
           <p:cNvSpPr txBox="1"/>
           <p:nvPr/>
         </p:nvSpPr>
@@ -16493,7 +17476,7 @@
       </p:sp>
       <p:graphicFrame>
         <p:nvGraphicFramePr>
-          <p:cNvPr id="8" name="Table 7"/>
+          <p:cNvPr id="9" name="Table 8"/>
           <p:cNvGraphicFramePr>
             <a:graphicFrameLocks noGrp="1"/>
           </p:cNvGraphicFramePr>
@@ -16852,7 +17835,7 @@
       </p:graphicFrame>
       <p:sp>
         <p:nvSpPr>
-          <p:cNvPr id="9" name="Rectangle 8"/>
+          <p:cNvPr id="10" name="Rectangle 9"/>
           <p:cNvSpPr/>
           <p:nvPr/>
         </p:nvSpPr>
@@ -16901,7 +17884,7 @@
       </p:sp>
       <p:sp>
         <p:nvSpPr>
-          <p:cNvPr id="10" name="TextBox 9"/>
+          <p:cNvPr id="11" name="TextBox 10"/>
           <p:cNvSpPr txBox="1"/>
           <p:nvPr/>
         </p:nvSpPr>
@@ -16943,7 +17926,7 @@
       </p:sp>
       <p:sp>
         <p:nvSpPr>
-          <p:cNvPr id="11" name="TextBox 10"/>
+          <p:cNvPr id="12" name="TextBox 11"/>
           <p:cNvSpPr txBox="1"/>
           <p:nvPr/>
         </p:nvSpPr>
@@ -16978,14 +17961,14 @@
               <a:rPr>
                 <a:latin typeface="Inter"/>
               </a:rPr>
-              <a:t>Confidential — prepared for internal investment use · Data as of 2026-09-30</a:t>
-            </a:r>
-          </a:p>
-        </p:txBody>
-      </p:sp>
-      <p:sp>
-        <p:nvSpPr>
-          <p:cNvPr id="12" name="TextBox 11"/>
+              <a:t>Confidential — Investment Committee · Data as of 2026-09-30</a:t>
+            </a:r>
+          </a:p>
+        </p:txBody>
+      </p:sp>
+      <p:sp>
+        <p:nvSpPr>
+          <p:cNvPr id="13" name="TextBox 12"/>
           <p:cNvSpPr txBox="1"/>
           <p:nvPr/>
         </p:nvSpPr>
@@ -17101,7 +18084,7 @@
         <p:spPr>
           <a:xfrm>
             <a:off x="640080" y="329184"/>
-            <a:ext cx="9875520" cy="182880"/>
+            <a:ext cx="5303520" cy="182880"/>
           </a:xfrm>
           <a:prstGeom prst="rect">
             <a:avLst/>
@@ -17142,6 +18125,48 @@
         </p:nvSpPr>
         <p:spPr>
           <a:xfrm>
+            <a:off x="5897880" y="310896"/>
+            <a:ext cx="4800600" cy="256032"/>
+          </a:xfrm>
+          <a:prstGeom prst="rect">
+            <a:avLst/>
+          </a:prstGeom>
+          <a:noFill/>
+        </p:spPr>
+        <p:txBody>
+          <a:bodyPr wrap="none" lIns="9144" rIns="9144" tIns="9144" bIns="9144" anchor="t">
+            <a:spAutoFit/>
+          </a:bodyPr>
+          <a:lstStyle/>
+          <a:p>
+            <a:pPr algn="r">
+              <a:spcAft>
+                <a:spcPts val="0"/>
+              </a:spcAft>
+              <a:defRPr sz="680" b="1">
+                <a:solidFill>
+                  <a:srgbClr val="4F6B00"/>
+                </a:solidFill>
+                <a:latin typeface="Inter"/>
+              </a:defRPr>
+            </a:pPr>
+            <a:r>
+              <a:rPr>
+                <a:latin typeface="Inter"/>
+              </a:rPr>
+              <a:t>Illustrative, Gradient Maintained — demo data, not the client's holdings or managers</a:t>
+            </a:r>
+          </a:p>
+        </p:txBody>
+      </p:sp>
+      <p:sp>
+        <p:nvSpPr>
+          <p:cNvPr id="5" name="TextBox 4"/>
+          <p:cNvSpPr txBox="1"/>
+          <p:nvPr/>
+        </p:nvSpPr>
+        <p:spPr>
+          <a:xfrm>
             <a:off x="640080" y="566928"/>
             <a:ext cx="10058400" cy="530352"/>
           </a:xfrm>
@@ -17178,7 +18203,7 @@
       </p:sp>
       <p:sp>
         <p:nvSpPr>
-          <p:cNvPr id="5" name="Rectangle 4"/>
+          <p:cNvPr id="6" name="Rectangle 5"/>
           <p:cNvSpPr/>
           <p:nvPr/>
         </p:nvSpPr>
@@ -17227,7 +18252,7 @@
       </p:sp>
       <p:sp>
         <p:nvSpPr>
-          <p:cNvPr id="6" name="Rectangle 5"/>
+          <p:cNvPr id="7" name="Rectangle 6"/>
           <p:cNvSpPr/>
           <p:nvPr/>
         </p:nvSpPr>
@@ -17276,7 +18301,7 @@
       </p:sp>
       <p:sp>
         <p:nvSpPr>
-          <p:cNvPr id="7" name="TextBox 6"/>
+          <p:cNvPr id="8" name="TextBox 7"/>
           <p:cNvSpPr txBox="1"/>
           <p:nvPr/>
         </p:nvSpPr>
@@ -17318,7 +18343,7 @@
       </p:sp>
       <p:graphicFrame>
         <p:nvGraphicFramePr>
-          <p:cNvPr id="8" name="Table 7"/>
+          <p:cNvPr id="9" name="Table 8"/>
           <p:cNvGraphicFramePr>
             <a:graphicFrameLocks noGrp="1"/>
           </p:cNvGraphicFramePr>
@@ -17326,7 +18351,7 @@
         </p:nvGraphicFramePr>
         <p:xfrm>
           <a:off x="640080" y="1325880"/>
-          <a:ext cx="10908792" cy="1549682"/>
+          <a:ext cx="10908792" cy="1348514"/>
         </p:xfrm>
         <a:graphic>
           <a:graphicData uri="http://schemas.openxmlformats.org/drawingml/2006/table">
@@ -17345,7 +18370,7 @@
                 <a:gridCol w="1112139"/>
                 <a:gridCol w="1112139"/>
               </a:tblGrid>
-              <a:tr h="387420">
+              <a:tr h="337128">
                 <a:tc>
                   <a:txBody>
                     <a:bodyPr/>
@@ -17590,7 +18615,7 @@
                   </a:tcPr>
                 </a:tc>
               </a:tr>
-              <a:tr h="387420">
+              <a:tr h="337128">
                 <a:tc>
                   <a:txBody>
                     <a:bodyPr/>
@@ -17716,7 +18741,7 @@
                         <a:rPr>
                           <a:latin typeface="Inter"/>
                         </a:rPr>
-                        <a:t>fixture=true</a:t>
+                        <a:t>illustrative sample</a:t>
                       </a:r>
                     </a:p>
                   </a:txBody>
@@ -17770,7 +18795,7 @@
                         <a:rPr>
                           <a:latin typeface="Inter"/>
                         </a:rPr>
-                        <a:t>Gradient-governed TEST evidence</a:t>
+                        <a:t>Gradient-governed review evidence</a:t>
                       </a:r>
                     </a:p>
                   </a:txBody>
@@ -17835,7 +18860,7 @@
                   </a:tcPr>
                 </a:tc>
               </a:tr>
-              <a:tr h="387420">
+              <a:tr h="337128">
                 <a:tc>
                   <a:txBody>
                     <a:bodyPr/>
@@ -17961,7 +18986,7 @@
                         <a:rPr>
                           <a:latin typeface="Inter"/>
                         </a:rPr>
-                        <a:t>fixture=true</a:t>
+                        <a:t>illustrative sample</a:t>
                       </a:r>
                     </a:p>
                   </a:txBody>
@@ -18015,7 +19040,7 @@
                         <a:rPr>
                           <a:latin typeface="Inter"/>
                         </a:rPr>
-                        <a:t>Gradient-governed TEST evidence</a:t>
+                        <a:t>Gradient-governed review evidence</a:t>
                       </a:r>
                     </a:p>
                   </a:txBody>
@@ -18080,7 +19105,7 @@
                   </a:tcPr>
                 </a:tc>
               </a:tr>
-              <a:tr h="387422">
+              <a:tr h="337130">
                 <a:tc>
                   <a:txBody>
                     <a:bodyPr/>
@@ -18206,7 +19231,7 @@
                         <a:rPr>
                           <a:latin typeface="Inter"/>
                         </a:rPr>
-                        <a:t>fixture=true</a:t>
+                        <a:t>illustrative sample</a:t>
                       </a:r>
                     </a:p>
                   </a:txBody>
@@ -18260,7 +19285,7 @@
                         <a:rPr>
                           <a:latin typeface="Inter"/>
                         </a:rPr>
-                        <a:t>Gradient-governed TEST evidence</a:t>
+                        <a:t>Gradient-governed review evidence</a:t>
                       </a:r>
                     </a:p>
                   </a:txBody>
@@ -18331,7 +19356,49 @@
       </p:graphicFrame>
       <p:sp>
         <p:nvSpPr>
-          <p:cNvPr id="9" name="TextBox 8"/>
+          <p:cNvPr id="10" name="TextBox 9"/>
+          <p:cNvSpPr txBox="1"/>
+          <p:nvPr/>
+        </p:nvSpPr>
+        <p:spPr>
+          <a:xfrm>
+            <a:off x="640080" y="2692682"/>
+            <a:ext cx="10908792" cy="164592"/>
+          </a:xfrm>
+          <a:prstGeom prst="rect">
+            <a:avLst/>
+          </a:prstGeom>
+          <a:noFill/>
+        </p:spPr>
+        <p:txBody>
+          <a:bodyPr wrap="none" lIns="9144" rIns="9144" tIns="9144" bIns="9144" anchor="t">
+            <a:spAutoFit/>
+          </a:bodyPr>
+          <a:lstStyle/>
+          <a:p>
+            <a:pPr algn="l">
+              <a:spcAft>
+                <a:spcPts val="0"/>
+              </a:spcAft>
+              <a:defRPr sz="680" b="0">
+                <a:solidFill>
+                  <a:srgbClr val="8A94A1"/>
+                </a:solidFill>
+                <a:latin typeface="Inter"/>
+              </a:defRPr>
+            </a:pPr>
+            <a:r>
+              <a:rPr>
+                <a:latin typeface="Inter"/>
+              </a:rPr>
+              <a:t>Illustrative, Gradient Maintained — demo data, not the client's holdings or managers. All organizations, portfolios, managers and results in this public example are illustrative.</a:t>
+            </a:r>
+          </a:p>
+        </p:txBody>
+      </p:sp>
+      <p:sp>
+        <p:nvSpPr>
+          <p:cNvPr id="11" name="TextBox 10"/>
           <p:cNvSpPr txBox="1"/>
           <p:nvPr/>
         </p:nvSpPr>
@@ -18373,7 +19440,7 @@
       </p:sp>
       <p:graphicFrame>
         <p:nvGraphicFramePr>
-          <p:cNvPr id="10" name="Table 9"/>
+          <p:cNvPr id="12" name="Table 11"/>
           <p:cNvGraphicFramePr>
             <a:graphicFrameLocks noGrp="1"/>
           </p:cNvGraphicFramePr>
@@ -19087,7 +20154,7 @@
       </p:graphicFrame>
       <p:sp>
         <p:nvSpPr>
-          <p:cNvPr id="11" name="TextBox 10"/>
+          <p:cNvPr id="13" name="TextBox 12"/>
           <p:cNvSpPr txBox="1"/>
           <p:nvPr/>
         </p:nvSpPr>
@@ -19129,7 +20196,7 @@
       </p:sp>
       <p:sp>
         <p:nvSpPr>
-          <p:cNvPr id="12" name="Rectangle 11"/>
+          <p:cNvPr id="14" name="Rectangle 13"/>
           <p:cNvSpPr/>
           <p:nvPr/>
         </p:nvSpPr>
@@ -19178,7 +20245,7 @@
       </p:sp>
       <p:sp>
         <p:nvSpPr>
-          <p:cNvPr id="13" name="Rectangle 12"/>
+          <p:cNvPr id="15" name="Rectangle 14"/>
           <p:cNvSpPr/>
           <p:nvPr/>
         </p:nvSpPr>
@@ -19227,7 +20294,7 @@
       </p:sp>
       <p:sp>
         <p:nvSpPr>
-          <p:cNvPr id="14" name="TextBox 13"/>
+          <p:cNvPr id="16" name="TextBox 15"/>
           <p:cNvSpPr txBox="1"/>
           <p:nvPr/>
         </p:nvSpPr>
@@ -19269,7 +20336,7 @@
       </p:sp>
       <p:sp>
         <p:nvSpPr>
-          <p:cNvPr id="15" name="TextBox 14"/>
+          <p:cNvPr id="17" name="TextBox 16"/>
           <p:cNvSpPr txBox="1"/>
           <p:nvPr/>
         </p:nvSpPr>
@@ -19311,7 +20378,7 @@
       </p:sp>
       <p:sp>
         <p:nvSpPr>
-          <p:cNvPr id="16" name="Rectangle 15"/>
+          <p:cNvPr id="18" name="Rectangle 17"/>
           <p:cNvSpPr/>
           <p:nvPr/>
         </p:nvSpPr>
@@ -19360,7 +20427,7 @@
       </p:sp>
       <p:sp>
         <p:nvSpPr>
-          <p:cNvPr id="17" name="TextBox 16"/>
+          <p:cNvPr id="19" name="TextBox 18"/>
           <p:cNvSpPr txBox="1"/>
           <p:nvPr/>
         </p:nvSpPr>
@@ -19402,7 +20469,7 @@
       </p:sp>
       <p:sp>
         <p:nvSpPr>
-          <p:cNvPr id="18" name="TextBox 17"/>
+          <p:cNvPr id="20" name="TextBox 19"/>
           <p:cNvSpPr txBox="1"/>
           <p:nvPr/>
         </p:nvSpPr>
@@ -19437,14 +20504,14 @@
               <a:rPr>
                 <a:latin typeface="Inter"/>
               </a:rPr>
-              <a:t>Confidential — prepared for internal investment use · Data as of 2026-09-30</a:t>
-            </a:r>
-          </a:p>
-        </p:txBody>
-      </p:sp>
-      <p:sp>
-        <p:nvSpPr>
-          <p:cNvPr id="19" name="TextBox 18"/>
+              <a:t>Confidential — Investment Committee · Data as of 2026-09-30</a:t>
+            </a:r>
+          </a:p>
+        </p:txBody>
+      </p:sp>
+      <p:sp>
+        <p:nvSpPr>
+          <p:cNvPr id="21" name="TextBox 20"/>
           <p:cNvSpPr txBox="1"/>
           <p:nvPr/>
         </p:nvSpPr>
@@ -19560,7 +20627,7 @@
         <p:spPr>
           <a:xfrm>
             <a:off x="640080" y="329184"/>
-            <a:ext cx="9875520" cy="182880"/>
+            <a:ext cx="5303520" cy="182880"/>
           </a:xfrm>
           <a:prstGeom prst="rect">
             <a:avLst/>
@@ -19601,6 +20668,48 @@
         </p:nvSpPr>
         <p:spPr>
           <a:xfrm>
+            <a:off x="5897880" y="310896"/>
+            <a:ext cx="4800600" cy="256032"/>
+          </a:xfrm>
+          <a:prstGeom prst="rect">
+            <a:avLst/>
+          </a:prstGeom>
+          <a:noFill/>
+        </p:spPr>
+        <p:txBody>
+          <a:bodyPr wrap="none" lIns="9144" rIns="9144" tIns="9144" bIns="9144" anchor="t">
+            <a:spAutoFit/>
+          </a:bodyPr>
+          <a:lstStyle/>
+          <a:p>
+            <a:pPr algn="r">
+              <a:spcAft>
+                <a:spcPts val="0"/>
+              </a:spcAft>
+              <a:defRPr sz="680" b="1">
+                <a:solidFill>
+                  <a:srgbClr val="4F6B00"/>
+                </a:solidFill>
+                <a:latin typeface="Inter"/>
+              </a:defRPr>
+            </a:pPr>
+            <a:r>
+              <a:rPr>
+                <a:latin typeface="Inter"/>
+              </a:rPr>
+              <a:t>Illustrative, Gradient Maintained — demo data, not the client's holdings or managers</a:t>
+            </a:r>
+          </a:p>
+        </p:txBody>
+      </p:sp>
+      <p:sp>
+        <p:nvSpPr>
+          <p:cNvPr id="5" name="TextBox 4"/>
+          <p:cNvSpPr txBox="1"/>
+          <p:nvPr/>
+        </p:nvSpPr>
+        <p:spPr>
+          <a:xfrm>
             <a:off x="640080" y="566928"/>
             <a:ext cx="10058400" cy="530352"/>
           </a:xfrm>
@@ -19637,7 +20746,7 @@
       </p:sp>
       <p:sp>
         <p:nvSpPr>
-          <p:cNvPr id="5" name="Rectangle 4"/>
+          <p:cNvPr id="6" name="Rectangle 5"/>
           <p:cNvSpPr/>
           <p:nvPr/>
         </p:nvSpPr>
@@ -19686,7 +20795,7 @@
       </p:sp>
       <p:sp>
         <p:nvSpPr>
-          <p:cNvPr id="6" name="Rectangle 5"/>
+          <p:cNvPr id="7" name="Rectangle 6"/>
           <p:cNvSpPr/>
           <p:nvPr/>
         </p:nvSpPr>
@@ -19735,7 +20844,7 @@
       </p:sp>
       <p:sp>
         <p:nvSpPr>
-          <p:cNvPr id="7" name="TextBox 6"/>
+          <p:cNvPr id="8" name="TextBox 7"/>
           <p:cNvSpPr txBox="1"/>
           <p:nvPr/>
         </p:nvSpPr>
@@ -19777,7 +20886,7 @@
       </p:sp>
       <p:sp>
         <p:nvSpPr>
-          <p:cNvPr id="8" name="Rectangle 7"/>
+          <p:cNvPr id="9" name="Rectangle 8"/>
           <p:cNvSpPr/>
           <p:nvPr/>
         </p:nvSpPr>
@@ -19826,7 +20935,7 @@
       </p:sp>
       <p:sp>
         <p:nvSpPr>
-          <p:cNvPr id="9" name="Rectangle 8"/>
+          <p:cNvPr id="10" name="Rectangle 9"/>
           <p:cNvSpPr/>
           <p:nvPr/>
         </p:nvSpPr>
@@ -19875,7 +20984,7 @@
       </p:sp>
       <p:sp>
         <p:nvSpPr>
-          <p:cNvPr id="10" name="TextBox 9"/>
+          <p:cNvPr id="11" name="TextBox 10"/>
           <p:cNvSpPr txBox="1"/>
           <p:nvPr/>
         </p:nvSpPr>
@@ -19917,7 +21026,7 @@
       </p:sp>
       <p:sp>
         <p:nvSpPr>
-          <p:cNvPr id="11" name="TextBox 10"/>
+          <p:cNvPr id="12" name="TextBox 11"/>
           <p:cNvSpPr txBox="1"/>
           <p:nvPr/>
         </p:nvSpPr>
@@ -19959,7 +21068,7 @@
       </p:sp>
       <p:sp>
         <p:nvSpPr>
-          <p:cNvPr id="12" name="Rectangle 11"/>
+          <p:cNvPr id="13" name="Rectangle 12"/>
           <p:cNvSpPr/>
           <p:nvPr/>
         </p:nvSpPr>
@@ -20008,7 +21117,7 @@
       </p:sp>
       <p:sp>
         <p:nvSpPr>
-          <p:cNvPr id="13" name="TextBox 12"/>
+          <p:cNvPr id="14" name="TextBox 13"/>
           <p:cNvSpPr txBox="1"/>
           <p:nvPr/>
         </p:nvSpPr>
@@ -20050,7 +21159,7 @@
       </p:sp>
       <p:sp>
         <p:nvSpPr>
-          <p:cNvPr id="14" name="TextBox 13"/>
+          <p:cNvPr id="15" name="TextBox 14"/>
           <p:cNvSpPr txBox="1"/>
           <p:nvPr/>
         </p:nvSpPr>
@@ -20085,14 +21194,14 @@
               <a:rPr>
                 <a:latin typeface="Inter"/>
               </a:rPr>
-              <a:t>Confidential — prepared for internal investment use · Data as of 2026-09-30</a:t>
-            </a:r>
-          </a:p>
-        </p:txBody>
-      </p:sp>
-      <p:sp>
-        <p:nvSpPr>
-          <p:cNvPr id="15" name="TextBox 14"/>
+              <a:t>Confidential — Investment Committee · Data as of 2026-09-30</a:t>
+            </a:r>
+          </a:p>
+        </p:txBody>
+      </p:sp>
+      <p:sp>
+        <p:nvSpPr>
+          <p:cNvPr id="16" name="TextBox 15"/>
           <p:cNvSpPr txBox="1"/>
           <p:nvPr/>
         </p:nvSpPr>
@@ -20208,7 +21317,7 @@
         <p:spPr>
           <a:xfrm>
             <a:off x="640080" y="329184"/>
-            <a:ext cx="9875520" cy="182880"/>
+            <a:ext cx="5303520" cy="182880"/>
           </a:xfrm>
           <a:prstGeom prst="rect">
             <a:avLst/>
@@ -20249,6 +21358,48 @@
         </p:nvSpPr>
         <p:spPr>
           <a:xfrm>
+            <a:off x="5897880" y="310896"/>
+            <a:ext cx="4800600" cy="256032"/>
+          </a:xfrm>
+          <a:prstGeom prst="rect">
+            <a:avLst/>
+          </a:prstGeom>
+          <a:noFill/>
+        </p:spPr>
+        <p:txBody>
+          <a:bodyPr wrap="none" lIns="9144" rIns="9144" tIns="9144" bIns="9144" anchor="t">
+            <a:spAutoFit/>
+          </a:bodyPr>
+          <a:lstStyle/>
+          <a:p>
+            <a:pPr algn="r">
+              <a:spcAft>
+                <a:spcPts val="0"/>
+              </a:spcAft>
+              <a:defRPr sz="680" b="1">
+                <a:solidFill>
+                  <a:srgbClr val="4F6B00"/>
+                </a:solidFill>
+                <a:latin typeface="Inter"/>
+              </a:defRPr>
+            </a:pPr>
+            <a:r>
+              <a:rPr>
+                <a:latin typeface="Inter"/>
+              </a:rPr>
+              <a:t>Illustrative, Gradient Maintained — demo data, not the client's holdings or managers</a:t>
+            </a:r>
+          </a:p>
+        </p:txBody>
+      </p:sp>
+      <p:sp>
+        <p:nvSpPr>
+          <p:cNvPr id="5" name="TextBox 4"/>
+          <p:cNvSpPr txBox="1"/>
+          <p:nvPr/>
+        </p:nvSpPr>
+        <p:spPr>
+          <a:xfrm>
             <a:off x="640080" y="566928"/>
             <a:ext cx="10058400" cy="530352"/>
           </a:xfrm>
@@ -20285,7 +21436,7 @@
       </p:sp>
       <p:sp>
         <p:nvSpPr>
-          <p:cNvPr id="5" name="Rectangle 4"/>
+          <p:cNvPr id="6" name="Rectangle 5"/>
           <p:cNvSpPr/>
           <p:nvPr/>
         </p:nvSpPr>
@@ -20334,7 +21485,7 @@
       </p:sp>
       <p:sp>
         <p:nvSpPr>
-          <p:cNvPr id="6" name="Rectangle 5"/>
+          <p:cNvPr id="7" name="Rectangle 6"/>
           <p:cNvSpPr/>
           <p:nvPr/>
         </p:nvSpPr>
@@ -20383,7 +21534,7 @@
       </p:sp>
       <p:sp>
         <p:nvSpPr>
-          <p:cNvPr id="7" name="TextBox 6"/>
+          <p:cNvPr id="8" name="TextBox 7"/>
           <p:cNvSpPr txBox="1"/>
           <p:nvPr/>
         </p:nvSpPr>
@@ -20425,7 +21576,7 @@
       </p:sp>
       <p:sp>
         <p:nvSpPr>
-          <p:cNvPr id="8" name="TextBox 7"/>
+          <p:cNvPr id="9" name="TextBox 8"/>
           <p:cNvSpPr txBox="1"/>
           <p:nvPr/>
         </p:nvSpPr>
@@ -20467,7 +21618,7 @@
       </p:sp>
       <p:graphicFrame>
         <p:nvGraphicFramePr>
-          <p:cNvPr id="9" name="Chart 8"/>
+          <p:cNvPr id="10" name="Chart 9"/>
           <p:cNvGraphicFramePr>
             <a:graphicFrameLocks noGrp="1"/>
           </p:cNvGraphicFramePr>
@@ -20485,7 +21636,7 @@
       </p:graphicFrame>
       <p:sp>
         <p:nvSpPr>
-          <p:cNvPr id="10" name="Rectangle 9"/>
+          <p:cNvPr id="11" name="Rectangle 10"/>
           <p:cNvSpPr/>
           <p:nvPr/>
         </p:nvSpPr>
@@ -20534,7 +21685,7 @@
       </p:sp>
       <p:sp>
         <p:nvSpPr>
-          <p:cNvPr id="11" name="TextBox 10"/>
+          <p:cNvPr id="12" name="TextBox 11"/>
           <p:cNvSpPr txBox="1"/>
           <p:nvPr/>
         </p:nvSpPr>
@@ -20576,7 +21727,7 @@
       </p:sp>
       <p:sp>
         <p:nvSpPr>
-          <p:cNvPr id="12" name="TextBox 11"/>
+          <p:cNvPr id="13" name="TextBox 12"/>
           <p:cNvSpPr txBox="1"/>
           <p:nvPr/>
         </p:nvSpPr>
@@ -20611,14 +21762,14 @@
               <a:rPr>
                 <a:latin typeface="Inter"/>
               </a:rPr>
-              <a:t>Confidential — prepared for internal investment use · Data as of 2026-09-30</a:t>
-            </a:r>
-          </a:p>
-        </p:txBody>
-      </p:sp>
-      <p:sp>
-        <p:nvSpPr>
-          <p:cNvPr id="13" name="TextBox 12"/>
+              <a:t>Confidential — Investment Committee · Data as of 2026-09-30</a:t>
+            </a:r>
+          </a:p>
+        </p:txBody>
+      </p:sp>
+      <p:sp>
+        <p:nvSpPr>
+          <p:cNvPr id="14" name="TextBox 13"/>
           <p:cNvSpPr txBox="1"/>
           <p:nvPr/>
         </p:nvSpPr>
@@ -20734,7 +21885,7 @@
         <p:spPr>
           <a:xfrm>
             <a:off x="640080" y="329184"/>
-            <a:ext cx="9875520" cy="182880"/>
+            <a:ext cx="5303520" cy="182880"/>
           </a:xfrm>
           <a:prstGeom prst="rect">
             <a:avLst/>
@@ -20775,6 +21926,48 @@
         </p:nvSpPr>
         <p:spPr>
           <a:xfrm>
+            <a:off x="5897880" y="310896"/>
+            <a:ext cx="4800600" cy="256032"/>
+          </a:xfrm>
+          <a:prstGeom prst="rect">
+            <a:avLst/>
+          </a:prstGeom>
+          <a:noFill/>
+        </p:spPr>
+        <p:txBody>
+          <a:bodyPr wrap="none" lIns="9144" rIns="9144" tIns="9144" bIns="9144" anchor="t">
+            <a:spAutoFit/>
+          </a:bodyPr>
+          <a:lstStyle/>
+          <a:p>
+            <a:pPr algn="r">
+              <a:spcAft>
+                <a:spcPts val="0"/>
+              </a:spcAft>
+              <a:defRPr sz="680" b="1">
+                <a:solidFill>
+                  <a:srgbClr val="4F6B00"/>
+                </a:solidFill>
+                <a:latin typeface="Inter"/>
+              </a:defRPr>
+            </a:pPr>
+            <a:r>
+              <a:rPr>
+                <a:latin typeface="Inter"/>
+              </a:rPr>
+              <a:t>Illustrative, Gradient Maintained — demo data, not the client's holdings or managers</a:t>
+            </a:r>
+          </a:p>
+        </p:txBody>
+      </p:sp>
+      <p:sp>
+        <p:nvSpPr>
+          <p:cNvPr id="5" name="TextBox 4"/>
+          <p:cNvSpPr txBox="1"/>
+          <p:nvPr/>
+        </p:nvSpPr>
+        <p:spPr>
+          <a:xfrm>
             <a:off x="640080" y="566928"/>
             <a:ext cx="10058400" cy="530352"/>
           </a:xfrm>
@@ -20811,7 +22004,7 @@
       </p:sp>
       <p:sp>
         <p:nvSpPr>
-          <p:cNvPr id="5" name="Rectangle 4"/>
+          <p:cNvPr id="6" name="Rectangle 5"/>
           <p:cNvSpPr/>
           <p:nvPr/>
         </p:nvSpPr>
@@ -20860,7 +22053,7 @@
       </p:sp>
       <p:sp>
         <p:nvSpPr>
-          <p:cNvPr id="6" name="Rectangle 5"/>
+          <p:cNvPr id="7" name="Rectangle 6"/>
           <p:cNvSpPr/>
           <p:nvPr/>
         </p:nvSpPr>
@@ -20909,7 +22102,7 @@
       </p:sp>
       <p:sp>
         <p:nvSpPr>
-          <p:cNvPr id="7" name="TextBox 6"/>
+          <p:cNvPr id="8" name="TextBox 7"/>
           <p:cNvSpPr txBox="1"/>
           <p:nvPr/>
         </p:nvSpPr>
@@ -20951,7 +22144,7 @@
       </p:sp>
       <p:sp>
         <p:nvSpPr>
-          <p:cNvPr id="8" name="TextBox 7"/>
+          <p:cNvPr id="9" name="TextBox 8"/>
           <p:cNvSpPr txBox="1"/>
           <p:nvPr/>
         </p:nvSpPr>
@@ -20993,7 +22186,7 @@
       </p:sp>
       <p:graphicFrame>
         <p:nvGraphicFramePr>
-          <p:cNvPr id="9" name="Chart 8"/>
+          <p:cNvPr id="10" name="Chart 9"/>
           <p:cNvGraphicFramePr>
             <a:graphicFrameLocks noGrp="1"/>
           </p:cNvGraphicFramePr>
@@ -21011,7 +22204,7 @@
       </p:graphicFrame>
       <p:sp>
         <p:nvSpPr>
-          <p:cNvPr id="10" name="Rectangle 9"/>
+          <p:cNvPr id="11" name="Rectangle 10"/>
           <p:cNvSpPr/>
           <p:nvPr/>
         </p:nvSpPr>
@@ -21060,7 +22253,7 @@
       </p:sp>
       <p:sp>
         <p:nvSpPr>
-          <p:cNvPr id="11" name="TextBox 10"/>
+          <p:cNvPr id="12" name="TextBox 11"/>
           <p:cNvSpPr txBox="1"/>
           <p:nvPr/>
         </p:nvSpPr>
@@ -21102,7 +22295,7 @@
       </p:sp>
       <p:sp>
         <p:nvSpPr>
-          <p:cNvPr id="12" name="TextBox 11"/>
+          <p:cNvPr id="13" name="TextBox 12"/>
           <p:cNvSpPr txBox="1"/>
           <p:nvPr/>
         </p:nvSpPr>
@@ -21137,14 +22330,14 @@
               <a:rPr>
                 <a:latin typeface="Inter"/>
               </a:rPr>
-              <a:t>Confidential — prepared for internal investment use · Data as of 2026-09-30</a:t>
-            </a:r>
-          </a:p>
-        </p:txBody>
-      </p:sp>
-      <p:sp>
-        <p:nvSpPr>
-          <p:cNvPr id="13" name="TextBox 12"/>
+              <a:t>Confidential — Investment Committee · Data as of 2026-09-30</a:t>
+            </a:r>
+          </a:p>
+        </p:txBody>
+      </p:sp>
+      <p:sp>
+        <p:nvSpPr>
+          <p:cNvPr id="14" name="TextBox 13"/>
           <p:cNvSpPr txBox="1"/>
           <p:nvPr/>
         </p:nvSpPr>
@@ -21260,7 +22453,7 @@
         <p:spPr>
           <a:xfrm>
             <a:off x="640080" y="329184"/>
-            <a:ext cx="9875520" cy="182880"/>
+            <a:ext cx="5303520" cy="182880"/>
           </a:xfrm>
           <a:prstGeom prst="rect">
             <a:avLst/>
@@ -21301,6 +22494,48 @@
         </p:nvSpPr>
         <p:spPr>
           <a:xfrm>
+            <a:off x="5897880" y="310896"/>
+            <a:ext cx="4800600" cy="256032"/>
+          </a:xfrm>
+          <a:prstGeom prst="rect">
+            <a:avLst/>
+          </a:prstGeom>
+          <a:noFill/>
+        </p:spPr>
+        <p:txBody>
+          <a:bodyPr wrap="none" lIns="9144" rIns="9144" tIns="9144" bIns="9144" anchor="t">
+            <a:spAutoFit/>
+          </a:bodyPr>
+          <a:lstStyle/>
+          <a:p>
+            <a:pPr algn="r">
+              <a:spcAft>
+                <a:spcPts val="0"/>
+              </a:spcAft>
+              <a:defRPr sz="680" b="1">
+                <a:solidFill>
+                  <a:srgbClr val="4F6B00"/>
+                </a:solidFill>
+                <a:latin typeface="Inter"/>
+              </a:defRPr>
+            </a:pPr>
+            <a:r>
+              <a:rPr>
+                <a:latin typeface="Inter"/>
+              </a:rPr>
+              <a:t>Illustrative, Gradient Maintained — demo data, not the client's holdings or managers</a:t>
+            </a:r>
+          </a:p>
+        </p:txBody>
+      </p:sp>
+      <p:sp>
+        <p:nvSpPr>
+          <p:cNvPr id="5" name="TextBox 4"/>
+          <p:cNvSpPr txBox="1"/>
+          <p:nvPr/>
+        </p:nvSpPr>
+        <p:spPr>
+          <a:xfrm>
             <a:off x="640080" y="566928"/>
             <a:ext cx="10058400" cy="530352"/>
           </a:xfrm>
@@ -21337,7 +22572,7 @@
       </p:sp>
       <p:sp>
         <p:nvSpPr>
-          <p:cNvPr id="5" name="Rectangle 4"/>
+          <p:cNvPr id="6" name="Rectangle 5"/>
           <p:cNvSpPr/>
           <p:nvPr/>
         </p:nvSpPr>
@@ -21386,7 +22621,7 @@
       </p:sp>
       <p:sp>
         <p:nvSpPr>
-          <p:cNvPr id="6" name="Rectangle 5"/>
+          <p:cNvPr id="7" name="Rectangle 6"/>
           <p:cNvSpPr/>
           <p:nvPr/>
         </p:nvSpPr>
@@ -21435,7 +22670,7 @@
       </p:sp>
       <p:sp>
         <p:nvSpPr>
-          <p:cNvPr id="7" name="TextBox 6"/>
+          <p:cNvPr id="8" name="TextBox 7"/>
           <p:cNvSpPr txBox="1"/>
           <p:nvPr/>
         </p:nvSpPr>
@@ -21477,7 +22712,7 @@
       </p:sp>
       <p:sp>
         <p:nvSpPr>
-          <p:cNvPr id="8" name="Rectangle 7"/>
+          <p:cNvPr id="9" name="Rectangle 8"/>
           <p:cNvSpPr/>
           <p:nvPr/>
         </p:nvSpPr>
@@ -21526,7 +22761,7 @@
       </p:sp>
       <p:sp>
         <p:nvSpPr>
-          <p:cNvPr id="9" name="Rectangle 8"/>
+          <p:cNvPr id="10" name="Rectangle 9"/>
           <p:cNvSpPr/>
           <p:nvPr/>
         </p:nvSpPr>
@@ -21575,7 +22810,7 @@
       </p:sp>
       <p:sp>
         <p:nvSpPr>
-          <p:cNvPr id="10" name="TextBox 9"/>
+          <p:cNvPr id="11" name="TextBox 10"/>
           <p:cNvSpPr txBox="1"/>
           <p:nvPr/>
         </p:nvSpPr>
@@ -21617,7 +22852,7 @@
       </p:sp>
       <p:sp>
         <p:nvSpPr>
-          <p:cNvPr id="11" name="TextBox 10"/>
+          <p:cNvPr id="12" name="TextBox 11"/>
           <p:cNvSpPr txBox="1"/>
           <p:nvPr/>
         </p:nvSpPr>
@@ -21659,7 +22894,7 @@
       </p:sp>
       <p:sp>
         <p:nvSpPr>
-          <p:cNvPr id="12" name="Rectangle 11"/>
+          <p:cNvPr id="13" name="Rectangle 12"/>
           <p:cNvSpPr/>
           <p:nvPr/>
         </p:nvSpPr>
@@ -21708,7 +22943,7 @@
       </p:sp>
       <p:sp>
         <p:nvSpPr>
-          <p:cNvPr id="13" name="Rectangle 12"/>
+          <p:cNvPr id="14" name="Rectangle 13"/>
           <p:cNvSpPr/>
           <p:nvPr/>
         </p:nvSpPr>
@@ -21757,7 +22992,7 @@
       </p:sp>
       <p:sp>
         <p:nvSpPr>
-          <p:cNvPr id="14" name="TextBox 13"/>
+          <p:cNvPr id="15" name="TextBox 14"/>
           <p:cNvSpPr txBox="1"/>
           <p:nvPr/>
         </p:nvSpPr>
@@ -21799,7 +23034,7 @@
       </p:sp>
       <p:sp>
         <p:nvSpPr>
-          <p:cNvPr id="15" name="TextBox 14"/>
+          <p:cNvPr id="16" name="TextBox 15"/>
           <p:cNvSpPr txBox="1"/>
           <p:nvPr/>
         </p:nvSpPr>
@@ -21841,7 +23076,7 @@
       </p:sp>
       <p:sp>
         <p:nvSpPr>
-          <p:cNvPr id="16" name="Rectangle 15"/>
+          <p:cNvPr id="17" name="Rectangle 16"/>
           <p:cNvSpPr/>
           <p:nvPr/>
         </p:nvSpPr>
@@ -21890,7 +23125,7 @@
       </p:sp>
       <p:sp>
         <p:nvSpPr>
-          <p:cNvPr id="17" name="Rectangle 16"/>
+          <p:cNvPr id="18" name="Rectangle 17"/>
           <p:cNvSpPr/>
           <p:nvPr/>
         </p:nvSpPr>
@@ -21939,7 +23174,7 @@
       </p:sp>
       <p:sp>
         <p:nvSpPr>
-          <p:cNvPr id="18" name="TextBox 17"/>
+          <p:cNvPr id="19" name="TextBox 18"/>
           <p:cNvSpPr txBox="1"/>
           <p:nvPr/>
         </p:nvSpPr>
@@ -21981,7 +23216,7 @@
       </p:sp>
       <p:sp>
         <p:nvSpPr>
-          <p:cNvPr id="19" name="TextBox 18"/>
+          <p:cNvPr id="20" name="TextBox 19"/>
           <p:cNvSpPr txBox="1"/>
           <p:nvPr/>
         </p:nvSpPr>
@@ -22023,7 +23258,7 @@
       </p:sp>
       <p:sp>
         <p:nvSpPr>
-          <p:cNvPr id="20" name="Rectangle 19"/>
+          <p:cNvPr id="21" name="Rectangle 20"/>
           <p:cNvSpPr/>
           <p:nvPr/>
         </p:nvSpPr>
@@ -22072,7 +23307,7 @@
       </p:sp>
       <p:sp>
         <p:nvSpPr>
-          <p:cNvPr id="21" name="TextBox 20"/>
+          <p:cNvPr id="22" name="TextBox 21"/>
           <p:cNvSpPr txBox="1"/>
           <p:nvPr/>
         </p:nvSpPr>
@@ -22114,7 +23349,7 @@
       </p:sp>
       <p:sp>
         <p:nvSpPr>
-          <p:cNvPr id="22" name="TextBox 21"/>
+          <p:cNvPr id="23" name="TextBox 22"/>
           <p:cNvSpPr txBox="1"/>
           <p:nvPr/>
         </p:nvSpPr>
@@ -22149,14 +23384,14 @@
               <a:rPr>
                 <a:latin typeface="Inter"/>
               </a:rPr>
-              <a:t>Confidential — prepared for internal investment use · Data as of 2026-09-30</a:t>
-            </a:r>
-          </a:p>
-        </p:txBody>
-      </p:sp>
-      <p:sp>
-        <p:nvSpPr>
-          <p:cNvPr id="23" name="TextBox 22"/>
+              <a:t>Confidential — Investment Committee · Data as of 2026-09-30</a:t>
+            </a:r>
+          </a:p>
+        </p:txBody>
+      </p:sp>
+      <p:sp>
+        <p:nvSpPr>
+          <p:cNvPr id="24" name="TextBox 23"/>
           <p:cNvSpPr txBox="1"/>
           <p:nvPr/>
         </p:nvSpPr>
@@ -22272,7 +23507,7 @@
         <p:spPr>
           <a:xfrm>
             <a:off x="640080" y="329184"/>
-            <a:ext cx="9875520" cy="182880"/>
+            <a:ext cx="5303520" cy="182880"/>
           </a:xfrm>
           <a:prstGeom prst="rect">
             <a:avLst/>
@@ -22313,6 +23548,48 @@
         </p:nvSpPr>
         <p:spPr>
           <a:xfrm>
+            <a:off x="5897880" y="310896"/>
+            <a:ext cx="4800600" cy="256032"/>
+          </a:xfrm>
+          <a:prstGeom prst="rect">
+            <a:avLst/>
+          </a:prstGeom>
+          <a:noFill/>
+        </p:spPr>
+        <p:txBody>
+          <a:bodyPr wrap="none" lIns="9144" rIns="9144" tIns="9144" bIns="9144" anchor="t">
+            <a:spAutoFit/>
+          </a:bodyPr>
+          <a:lstStyle/>
+          <a:p>
+            <a:pPr algn="r">
+              <a:spcAft>
+                <a:spcPts val="0"/>
+              </a:spcAft>
+              <a:defRPr sz="680" b="1">
+                <a:solidFill>
+                  <a:srgbClr val="4F6B00"/>
+                </a:solidFill>
+                <a:latin typeface="Inter"/>
+              </a:defRPr>
+            </a:pPr>
+            <a:r>
+              <a:rPr>
+                <a:latin typeface="Inter"/>
+              </a:rPr>
+              <a:t>Illustrative, Gradient Maintained — demo data, not the client's holdings or managers</a:t>
+            </a:r>
+          </a:p>
+        </p:txBody>
+      </p:sp>
+      <p:sp>
+        <p:nvSpPr>
+          <p:cNvPr id="5" name="TextBox 4"/>
+          <p:cNvSpPr txBox="1"/>
+          <p:nvPr/>
+        </p:nvSpPr>
+        <p:spPr>
+          <a:xfrm>
             <a:off x="640080" y="566928"/>
             <a:ext cx="10058400" cy="530352"/>
           </a:xfrm>
@@ -22349,7 +23626,7 @@
       </p:sp>
       <p:sp>
         <p:nvSpPr>
-          <p:cNvPr id="5" name="Rectangle 4"/>
+          <p:cNvPr id="6" name="Rectangle 5"/>
           <p:cNvSpPr/>
           <p:nvPr/>
         </p:nvSpPr>
@@ -22398,7 +23675,7 @@
       </p:sp>
       <p:sp>
         <p:nvSpPr>
-          <p:cNvPr id="6" name="Rectangle 5"/>
+          <p:cNvPr id="7" name="Rectangle 6"/>
           <p:cNvSpPr/>
           <p:nvPr/>
         </p:nvSpPr>
@@ -22447,7 +23724,7 @@
       </p:sp>
       <p:sp>
         <p:nvSpPr>
-          <p:cNvPr id="7" name="TextBox 6"/>
+          <p:cNvPr id="8" name="TextBox 7"/>
           <p:cNvSpPr txBox="1"/>
           <p:nvPr/>
         </p:nvSpPr>
@@ -22489,7 +23766,7 @@
       </p:sp>
       <p:sp>
         <p:nvSpPr>
-          <p:cNvPr id="8" name="Rectangle 7"/>
+          <p:cNvPr id="9" name="Rectangle 8"/>
           <p:cNvSpPr/>
           <p:nvPr/>
         </p:nvSpPr>
@@ -22538,7 +23815,7 @@
       </p:sp>
       <p:sp>
         <p:nvSpPr>
-          <p:cNvPr id="9" name="TextBox 8"/>
+          <p:cNvPr id="10" name="TextBox 9"/>
           <p:cNvSpPr txBox="1"/>
           <p:nvPr/>
         </p:nvSpPr>
@@ -22580,7 +23857,7 @@
       </p:sp>
       <p:sp>
         <p:nvSpPr>
-          <p:cNvPr id="10" name="TextBox 9"/>
+          <p:cNvPr id="11" name="TextBox 10"/>
           <p:cNvSpPr txBox="1"/>
           <p:nvPr/>
         </p:nvSpPr>
@@ -22622,7 +23899,7 @@
       </p:sp>
       <p:graphicFrame>
         <p:nvGraphicFramePr>
-          <p:cNvPr id="11" name="Table 10"/>
+          <p:cNvPr id="12" name="Table 11"/>
           <p:cNvGraphicFramePr>
             <a:graphicFrameLocks noGrp="1"/>
           </p:cNvGraphicFramePr>
@@ -22815,7 +24092,7 @@
       </p:graphicFrame>
       <p:sp>
         <p:nvSpPr>
-          <p:cNvPr id="12" name="Rectangle 11"/>
+          <p:cNvPr id="13" name="Rectangle 12"/>
           <p:cNvSpPr/>
           <p:nvPr/>
         </p:nvSpPr>
@@ -22864,7 +24141,7 @@
       </p:sp>
       <p:sp>
         <p:nvSpPr>
-          <p:cNvPr id="13" name="TextBox 12"/>
+          <p:cNvPr id="14" name="TextBox 13"/>
           <p:cNvSpPr txBox="1"/>
           <p:nvPr/>
         </p:nvSpPr>
@@ -22906,7 +24183,7 @@
       </p:sp>
       <p:sp>
         <p:nvSpPr>
-          <p:cNvPr id="14" name="TextBox 13"/>
+          <p:cNvPr id="15" name="TextBox 14"/>
           <p:cNvSpPr txBox="1"/>
           <p:nvPr/>
         </p:nvSpPr>
@@ -22941,14 +24218,14 @@
               <a:rPr>
                 <a:latin typeface="Inter"/>
               </a:rPr>
-              <a:t>Confidential — prepared for internal investment use · Data as of 2026-09-30</a:t>
-            </a:r>
-          </a:p>
-        </p:txBody>
-      </p:sp>
-      <p:sp>
-        <p:nvSpPr>
-          <p:cNvPr id="15" name="TextBox 14"/>
+              <a:t>Confidential — Investment Committee · Data as of 2026-09-30</a:t>
+            </a:r>
+          </a:p>
+        </p:txBody>
+      </p:sp>
+      <p:sp>
+        <p:nvSpPr>
+          <p:cNvPr id="16" name="TextBox 15"/>
           <p:cNvSpPr txBox="1"/>
           <p:nvPr/>
         </p:nvSpPr>
@@ -23064,7 +24341,7 @@
         <p:spPr>
           <a:xfrm>
             <a:off x="640080" y="329184"/>
-            <a:ext cx="9875520" cy="182880"/>
+            <a:ext cx="5303520" cy="182880"/>
           </a:xfrm>
           <a:prstGeom prst="rect">
             <a:avLst/>
@@ -23105,6 +24382,48 @@
         </p:nvSpPr>
         <p:spPr>
           <a:xfrm>
+            <a:off x="5897880" y="310896"/>
+            <a:ext cx="4800600" cy="256032"/>
+          </a:xfrm>
+          <a:prstGeom prst="rect">
+            <a:avLst/>
+          </a:prstGeom>
+          <a:noFill/>
+        </p:spPr>
+        <p:txBody>
+          <a:bodyPr wrap="none" lIns="9144" rIns="9144" tIns="9144" bIns="9144" anchor="t">
+            <a:spAutoFit/>
+          </a:bodyPr>
+          <a:lstStyle/>
+          <a:p>
+            <a:pPr algn="r">
+              <a:spcAft>
+                <a:spcPts val="0"/>
+              </a:spcAft>
+              <a:defRPr sz="680" b="1">
+                <a:solidFill>
+                  <a:srgbClr val="4F6B00"/>
+                </a:solidFill>
+                <a:latin typeface="Inter"/>
+              </a:defRPr>
+            </a:pPr>
+            <a:r>
+              <a:rPr>
+                <a:latin typeface="Inter"/>
+              </a:rPr>
+              <a:t>Illustrative, Gradient Maintained — demo data, not the client's holdings or managers</a:t>
+            </a:r>
+          </a:p>
+        </p:txBody>
+      </p:sp>
+      <p:sp>
+        <p:nvSpPr>
+          <p:cNvPr id="5" name="TextBox 4"/>
+          <p:cNvSpPr txBox="1"/>
+          <p:nvPr/>
+        </p:nvSpPr>
+        <p:spPr>
+          <a:xfrm>
             <a:off x="640080" y="566928"/>
             <a:ext cx="10058400" cy="530352"/>
           </a:xfrm>
@@ -23141,7 +24460,7 @@
       </p:sp>
       <p:sp>
         <p:nvSpPr>
-          <p:cNvPr id="5" name="Rectangle 4"/>
+          <p:cNvPr id="6" name="Rectangle 5"/>
           <p:cNvSpPr/>
           <p:nvPr/>
         </p:nvSpPr>
@@ -23190,7 +24509,7 @@
       </p:sp>
       <p:sp>
         <p:nvSpPr>
-          <p:cNvPr id="6" name="Rectangle 5"/>
+          <p:cNvPr id="7" name="Rectangle 6"/>
           <p:cNvSpPr/>
           <p:nvPr/>
         </p:nvSpPr>
@@ -23239,7 +24558,7 @@
       </p:sp>
       <p:sp>
         <p:nvSpPr>
-          <p:cNvPr id="7" name="TextBox 6"/>
+          <p:cNvPr id="8" name="TextBox 7"/>
           <p:cNvSpPr txBox="1"/>
           <p:nvPr/>
         </p:nvSpPr>
@@ -23281,7 +24600,7 @@
       </p:sp>
       <p:sp>
         <p:nvSpPr>
-          <p:cNvPr id="8" name="TextBox 7"/>
+          <p:cNvPr id="9" name="TextBox 8"/>
           <p:cNvSpPr txBox="1"/>
           <p:nvPr/>
         </p:nvSpPr>
@@ -23323,7 +24642,7 @@
       </p:sp>
       <p:graphicFrame>
         <p:nvGraphicFramePr>
-          <p:cNvPr id="9" name="Chart 8"/>
+          <p:cNvPr id="10" name="Chart 9"/>
           <p:cNvGraphicFramePr>
             <a:graphicFrameLocks noGrp="1"/>
           </p:cNvGraphicFramePr>
@@ -23341,7 +24660,7 @@
       </p:graphicFrame>
       <p:sp>
         <p:nvSpPr>
-          <p:cNvPr id="10" name="Rectangle 9"/>
+          <p:cNvPr id="11" name="Rectangle 10"/>
           <p:cNvSpPr/>
           <p:nvPr/>
         </p:nvSpPr>
@@ -23390,7 +24709,7 @@
       </p:sp>
       <p:sp>
         <p:nvSpPr>
-          <p:cNvPr id="11" name="TextBox 10"/>
+          <p:cNvPr id="12" name="TextBox 11"/>
           <p:cNvSpPr txBox="1"/>
           <p:nvPr/>
         </p:nvSpPr>
@@ -23432,7 +24751,7 @@
       </p:sp>
       <p:sp>
         <p:nvSpPr>
-          <p:cNvPr id="12" name="TextBox 11"/>
+          <p:cNvPr id="13" name="TextBox 12"/>
           <p:cNvSpPr txBox="1"/>
           <p:nvPr/>
         </p:nvSpPr>
@@ -23467,14 +24786,14 @@
               <a:rPr>
                 <a:latin typeface="Inter"/>
               </a:rPr>
-              <a:t>Confidential — prepared for internal investment use · Data as of 2026-09-30</a:t>
-            </a:r>
-          </a:p>
-        </p:txBody>
-      </p:sp>
-      <p:sp>
-        <p:nvSpPr>
-          <p:cNvPr id="13" name="TextBox 12"/>
+              <a:t>Confidential — Investment Committee · Data as of 2026-09-30</a:t>
+            </a:r>
+          </a:p>
+        </p:txBody>
+      </p:sp>
+      <p:sp>
+        <p:nvSpPr>
+          <p:cNvPr id="14" name="TextBox 13"/>
           <p:cNvSpPr txBox="1"/>
           <p:nvPr/>
         </p:nvSpPr>
@@ -23590,7 +24909,7 @@
         <p:spPr>
           <a:xfrm>
             <a:off x="640080" y="329184"/>
-            <a:ext cx="9875520" cy="182880"/>
+            <a:ext cx="5303520" cy="182880"/>
           </a:xfrm>
           <a:prstGeom prst="rect">
             <a:avLst/>
@@ -23631,6 +24950,48 @@
         </p:nvSpPr>
         <p:spPr>
           <a:xfrm>
+            <a:off x="5897880" y="310896"/>
+            <a:ext cx="4800600" cy="256032"/>
+          </a:xfrm>
+          <a:prstGeom prst="rect">
+            <a:avLst/>
+          </a:prstGeom>
+          <a:noFill/>
+        </p:spPr>
+        <p:txBody>
+          <a:bodyPr wrap="none" lIns="9144" rIns="9144" tIns="9144" bIns="9144" anchor="t">
+            <a:spAutoFit/>
+          </a:bodyPr>
+          <a:lstStyle/>
+          <a:p>
+            <a:pPr algn="r">
+              <a:spcAft>
+                <a:spcPts val="0"/>
+              </a:spcAft>
+              <a:defRPr sz="680" b="1">
+                <a:solidFill>
+                  <a:srgbClr val="4F6B00"/>
+                </a:solidFill>
+                <a:latin typeface="Inter"/>
+              </a:defRPr>
+            </a:pPr>
+            <a:r>
+              <a:rPr>
+                <a:latin typeface="Inter"/>
+              </a:rPr>
+              <a:t>Illustrative, Gradient Maintained — demo data, not the client's holdings or managers</a:t>
+            </a:r>
+          </a:p>
+        </p:txBody>
+      </p:sp>
+      <p:sp>
+        <p:nvSpPr>
+          <p:cNvPr id="5" name="TextBox 4"/>
+          <p:cNvSpPr txBox="1"/>
+          <p:nvPr/>
+        </p:nvSpPr>
+        <p:spPr>
+          <a:xfrm>
             <a:off x="640080" y="566928"/>
             <a:ext cx="10058400" cy="530352"/>
           </a:xfrm>
@@ -23667,7 +25028,7 @@
       </p:sp>
       <p:sp>
         <p:nvSpPr>
-          <p:cNvPr id="5" name="Rectangle 4"/>
+          <p:cNvPr id="6" name="Rectangle 5"/>
           <p:cNvSpPr/>
           <p:nvPr/>
         </p:nvSpPr>
@@ -23716,7 +25077,7 @@
       </p:sp>
       <p:sp>
         <p:nvSpPr>
-          <p:cNvPr id="6" name="Rectangle 5"/>
+          <p:cNvPr id="7" name="Rectangle 6"/>
           <p:cNvSpPr/>
           <p:nvPr/>
         </p:nvSpPr>
@@ -23765,7 +25126,7 @@
       </p:sp>
       <p:sp>
         <p:nvSpPr>
-          <p:cNvPr id="7" name="TextBox 6"/>
+          <p:cNvPr id="8" name="TextBox 7"/>
           <p:cNvSpPr txBox="1"/>
           <p:nvPr/>
         </p:nvSpPr>
@@ -23807,7 +25168,7 @@
       </p:sp>
       <p:sp>
         <p:nvSpPr>
-          <p:cNvPr id="8" name="TextBox 7"/>
+          <p:cNvPr id="9" name="TextBox 8"/>
           <p:cNvSpPr txBox="1"/>
           <p:nvPr/>
         </p:nvSpPr>
@@ -23849,7 +25210,7 @@
       </p:sp>
       <p:graphicFrame>
         <p:nvGraphicFramePr>
-          <p:cNvPr id="9" name="Chart 8"/>
+          <p:cNvPr id="10" name="Chart 9"/>
           <p:cNvGraphicFramePr>
             <a:graphicFrameLocks noGrp="1"/>
           </p:cNvGraphicFramePr>
@@ -23867,7 +25228,7 @@
       </p:graphicFrame>
       <p:sp>
         <p:nvSpPr>
-          <p:cNvPr id="10" name="Rectangle 9"/>
+          <p:cNvPr id="11" name="Rectangle 10"/>
           <p:cNvSpPr/>
           <p:nvPr/>
         </p:nvSpPr>
@@ -23916,7 +25277,7 @@
       </p:sp>
       <p:sp>
         <p:nvSpPr>
-          <p:cNvPr id="11" name="TextBox 10"/>
+          <p:cNvPr id="12" name="TextBox 11"/>
           <p:cNvSpPr txBox="1"/>
           <p:nvPr/>
         </p:nvSpPr>
@@ -23958,7 +25319,7 @@
       </p:sp>
       <p:sp>
         <p:nvSpPr>
-          <p:cNvPr id="12" name="TextBox 11"/>
+          <p:cNvPr id="13" name="TextBox 12"/>
           <p:cNvSpPr txBox="1"/>
           <p:nvPr/>
         </p:nvSpPr>
@@ -23993,14 +25354,14 @@
               <a:rPr>
                 <a:latin typeface="Inter"/>
               </a:rPr>
-              <a:t>Confidential — prepared for internal investment use · Data as of 2026-09-30</a:t>
-            </a:r>
-          </a:p>
-        </p:txBody>
-      </p:sp>
-      <p:sp>
-        <p:nvSpPr>
-          <p:cNvPr id="13" name="TextBox 12"/>
+              <a:t>Confidential — Investment Committee · Data as of 2026-09-30</a:t>
+            </a:r>
+          </a:p>
+        </p:txBody>
+      </p:sp>
+      <p:sp>
+        <p:nvSpPr>
+          <p:cNvPr id="14" name="TextBox 13"/>
           <p:cNvSpPr txBox="1"/>
           <p:nvPr/>
         </p:nvSpPr>
@@ -24116,7 +25477,7 @@
         <p:spPr>
           <a:xfrm>
             <a:off x="640080" y="329184"/>
-            <a:ext cx="9875520" cy="182880"/>
+            <a:ext cx="5303520" cy="182880"/>
           </a:xfrm>
           <a:prstGeom prst="rect">
             <a:avLst/>
@@ -24157,6 +25518,48 @@
         </p:nvSpPr>
         <p:spPr>
           <a:xfrm>
+            <a:off x="5897880" y="310896"/>
+            <a:ext cx="4800600" cy="256032"/>
+          </a:xfrm>
+          <a:prstGeom prst="rect">
+            <a:avLst/>
+          </a:prstGeom>
+          <a:noFill/>
+        </p:spPr>
+        <p:txBody>
+          <a:bodyPr wrap="none" lIns="9144" rIns="9144" tIns="9144" bIns="9144" anchor="t">
+            <a:spAutoFit/>
+          </a:bodyPr>
+          <a:lstStyle/>
+          <a:p>
+            <a:pPr algn="r">
+              <a:spcAft>
+                <a:spcPts val="0"/>
+              </a:spcAft>
+              <a:defRPr sz="680" b="1">
+                <a:solidFill>
+                  <a:srgbClr val="4F6B00"/>
+                </a:solidFill>
+                <a:latin typeface="Inter"/>
+              </a:defRPr>
+            </a:pPr>
+            <a:r>
+              <a:rPr>
+                <a:latin typeface="Inter"/>
+              </a:rPr>
+              <a:t>Illustrative, Gradient Maintained — demo data, not the client's holdings or managers</a:t>
+            </a:r>
+          </a:p>
+        </p:txBody>
+      </p:sp>
+      <p:sp>
+        <p:nvSpPr>
+          <p:cNvPr id="5" name="TextBox 4"/>
+          <p:cNvSpPr txBox="1"/>
+          <p:nvPr/>
+        </p:nvSpPr>
+        <p:spPr>
+          <a:xfrm>
             <a:off x="640080" y="566928"/>
             <a:ext cx="10058400" cy="530352"/>
           </a:xfrm>
@@ -24193,7 +25596,7 @@
       </p:sp>
       <p:sp>
         <p:nvSpPr>
-          <p:cNvPr id="5" name="Rectangle 4"/>
+          <p:cNvPr id="6" name="Rectangle 5"/>
           <p:cNvSpPr/>
           <p:nvPr/>
         </p:nvSpPr>
@@ -24242,7 +25645,7 @@
       </p:sp>
       <p:sp>
         <p:nvSpPr>
-          <p:cNvPr id="6" name="Rectangle 5"/>
+          <p:cNvPr id="7" name="Rectangle 6"/>
           <p:cNvSpPr/>
           <p:nvPr/>
         </p:nvSpPr>
@@ -24291,7 +25694,7 @@
       </p:sp>
       <p:sp>
         <p:nvSpPr>
-          <p:cNvPr id="7" name="TextBox 6"/>
+          <p:cNvPr id="8" name="TextBox 7"/>
           <p:cNvSpPr txBox="1"/>
           <p:nvPr/>
         </p:nvSpPr>
@@ -24333,7 +25736,7 @@
       </p:sp>
       <p:sp>
         <p:nvSpPr>
-          <p:cNvPr id="8" name="TextBox 7"/>
+          <p:cNvPr id="9" name="TextBox 8"/>
           <p:cNvSpPr txBox="1"/>
           <p:nvPr/>
         </p:nvSpPr>
@@ -24375,7 +25778,7 @@
       </p:sp>
       <p:graphicFrame>
         <p:nvGraphicFramePr>
-          <p:cNvPr id="9" name="Chart 8"/>
+          <p:cNvPr id="10" name="Chart 9"/>
           <p:cNvGraphicFramePr>
             <a:graphicFrameLocks noGrp="1"/>
           </p:cNvGraphicFramePr>
@@ -24393,7 +25796,7 @@
       </p:graphicFrame>
       <p:sp>
         <p:nvSpPr>
-          <p:cNvPr id="10" name="Rectangle 9"/>
+          <p:cNvPr id="11" name="Rectangle 10"/>
           <p:cNvSpPr/>
           <p:nvPr/>
         </p:nvSpPr>
@@ -24442,7 +25845,7 @@
       </p:sp>
       <p:sp>
         <p:nvSpPr>
-          <p:cNvPr id="11" name="TextBox 10"/>
+          <p:cNvPr id="12" name="TextBox 11"/>
           <p:cNvSpPr txBox="1"/>
           <p:nvPr/>
         </p:nvSpPr>
@@ -24484,7 +25887,7 @@
       </p:sp>
       <p:sp>
         <p:nvSpPr>
-          <p:cNvPr id="12" name="TextBox 11"/>
+          <p:cNvPr id="13" name="TextBox 12"/>
           <p:cNvSpPr txBox="1"/>
           <p:nvPr/>
         </p:nvSpPr>
@@ -24519,14 +25922,14 @@
               <a:rPr>
                 <a:latin typeface="Inter"/>
               </a:rPr>
-              <a:t>Confidential — prepared for internal investment use · Data as of 2026-09-30</a:t>
-            </a:r>
-          </a:p>
-        </p:txBody>
-      </p:sp>
-      <p:sp>
-        <p:nvSpPr>
-          <p:cNvPr id="13" name="TextBox 12"/>
+              <a:t>Confidential — Investment Committee · Data as of 2026-09-30</a:t>
+            </a:r>
+          </a:p>
+        </p:txBody>
+      </p:sp>
+      <p:sp>
+        <p:nvSpPr>
+          <p:cNvPr id="14" name="TextBox 13"/>
           <p:cNvSpPr txBox="1"/>
           <p:nvPr/>
         </p:nvSpPr>
